--- a/Hyde Park BESS/6) Cost Analysis Deliverables/Hyde Park BESS - Leadership Brief.pptx
+++ b/Hyde Park BESS/6) Cost Analysis Deliverables/Hyde Park BESS - Leadership Brief.pptx
@@ -18,6 +18,7 @@
     <p:sldId id="266" r:id="rId18"/>
     <p:sldId id="267" r:id="rId19"/>
     <p:sldId id="268" r:id="rId20"/>
+    <p:sldId id="269" r:id="rId21"/>
   </p:sldIdLst>
   <p:sldSz cx="12191695" cy="6858000" type="screen4x3"/>
   <p:notesSz cx="6858000" cy="9144000"/>
@@ -190,16 +191,16 @@
                   <c:v>51.291</c:v>
                 </c:pt>
                 <c:pt idx="2">
-                  <c:v>44.439</c:v>
+                  <c:v>39.461</c:v>
                 </c:pt>
                 <c:pt idx="3">
                   <c:v>0</c:v>
                 </c:pt>
                 <c:pt idx="4">
-                  <c:v>44.439</c:v>
+                  <c:v>39.461</c:v>
                 </c:pt>
                 <c:pt idx="5">
-                  <c:v>46.888</c:v>
+                  <c:v>42.413</c:v>
                 </c:pt>
                 <c:pt idx="6">
                   <c:v>0</c:v>
@@ -296,7 +297,7 @@
                   <c:v>0</c:v>
                 </c:pt>
                 <c:pt idx="3">
-                  <c:v>44.439</c:v>
+                  <c:v>39.461</c:v>
                 </c:pt>
                 <c:pt idx="4">
                   <c:v>0</c:v>
@@ -305,7 +306,7 @@
                   <c:v>0</c:v>
                 </c:pt>
                 <c:pt idx="6">
-                  <c:v>55.53</c:v>
+                  <c:v>51.056</c:v>
                 </c:pt>
               </c:numCache>
             </c:numRef>
@@ -396,7 +397,7 @@
                   <c:v>5.956</c:v>
                 </c:pt>
                 <c:pt idx="2">
-                  <c:v>6.852</c:v>
+                  <c:v>11.83</c:v>
                 </c:pt>
                 <c:pt idx="3">
                   <c:v>0</c:v>
@@ -505,7 +506,7 @@
                   <c:v>0</c:v>
                 </c:pt>
                 <c:pt idx="4">
-                  <c:v>2.449</c:v>
+                  <c:v>2.953</c:v>
                 </c:pt>
                 <c:pt idx="5">
                   <c:v>8.642</c:v>
@@ -1071,7 +1072,7 @@
           <a:lstStyle/>
           <a:p>
             <a:r>
-              <a:t>The containment plan from scope_challenge.json. The first gate is the November 2026 PAF; it carries the six no-study decisions and the honest exposures. Gate 1 closes the studies. Gate 2 sets the target. Gate 3 sets the contracting strategy. The standing item is the monthly report.</a:t>
+              <a:t>Tornado from the integrated Monte Carlo (20,000 trials, mc_scope_schedule.py): each driver's P10 to P90 effect on the loaded total. Variance shares are Spearman contributions to the spread of the managed outcome. The leadership point: the downside is concentrated in two items with owners, the upside is distributed across sixteen items that are mostly decisions.</a:t>
             </a:r>
           </a:p>
         </p:txBody>
@@ -1141,7 +1142,7 @@
           <a:lstStyle/>
           <a:p>
             <a:r>
-              <a:t>Integrated Monte Carlo (mc_scope_results.json): base = approval less reserves ($49.6M), plus layer accuracy ranges, plus threats not in the estimate at their odds, plus schedule cost, less the levers at their assessed odds (managed) or at full value (ceiling). Schedule: P50 slip 5 months, P80 9 months, 39% chance of more than 6 months.</a:t>
+              <a:t>The containment plan from scope_challenge.json. The first gate is the November 2026 PAF; it carries the six no-study decisions and the honest exposures. Gate 1 closes the studies. Gate 2 sets the target. Gate 3 sets the contracting strategy. The standing item is the monthly report.</a:t>
             </a:r>
           </a:p>
         </p:txBody>
@@ -1211,7 +1212,7 @@
           <a:lstStyle/>
           <a:p>
             <a:r>
-              <a:t>Mirror of the open. This slide stays up during discussion. Each decision maps to a gate on slide 10 and to a row in the savings register in the workbook.</a:t>
+              <a:t>Integrated Monte Carlo (mc_scope_results.json): base = approval less reserves ($49.6M), plus layer accuracy ranges, plus threats not in the estimate at their odds, plus schedule cost, less the levers at their assessed odds (managed) or at full value (ceiling). Schedule: P50 slip 5 months, P80 9 months, 39% chance of more than 6 months.</a:t>
             </a:r>
           </a:p>
         </p:txBody>
@@ -1281,6 +1282,76 @@
           <a:lstStyle/>
           <a:p>
             <a:r>
+              <a:t>Mirror of the open. This slide stays up during discussion. Each decision maps to a gate on slide 10 and to a row in the savings register in the workbook.</a:t>
+            </a:r>
+          </a:p>
+        </p:txBody>
+      </p:sp>
+      <p:sp>
+        <p:nvSpPr>
+          <p:cNvPr id="4" name="Slide Number Placeholder 3"/>
+          <p:cNvSpPr>
+            <a:spLocks noGrp="1"/>
+          </p:cNvSpPr>
+          <p:nvPr>
+            <p:ph type="sldNum" idx="5" sz="quarter"/>
+          </p:nvPr>
+        </p:nvSpPr>
+        <p:spPr/>
+      </p:sp>
+    </p:spTree>
+  </p:cSld>
+  <p:clrMapOvr>
+    <a:masterClrMapping/>
+  </p:clrMapOvr>
+</p:notes>
+</file>
+
+<file path=ppt/notesSlides/notesSlide14.xml><?xml version="1.0" encoding="utf-8"?>
+<p:notes xmlns:a="http://schemas.openxmlformats.org/drawingml/2006/main" xmlns:p="http://schemas.openxmlformats.org/presentationml/2006/main" xmlns:r="http://schemas.openxmlformats.org/officeDocument/2006/relationships">
+  <p:cSld>
+    <p:spTree>
+      <p:nvGrpSpPr>
+        <p:cNvPr id="1" name=""/>
+        <p:cNvGrpSpPr/>
+        <p:nvPr/>
+      </p:nvGrpSpPr>
+      <p:grpSpPr>
+        <a:xfrm>
+          <a:off x="0" y="0"/>
+          <a:ext cx="0" cy="0"/>
+          <a:chOff x="0" y="0"/>
+          <a:chExt cx="0" cy="0"/>
+        </a:xfrm>
+      </p:grpSpPr>
+      <p:sp>
+        <p:nvSpPr>
+          <p:cNvPr id="2" name="Slide Image Placeholder 1"/>
+          <p:cNvSpPr>
+            <a:spLocks noGrp="1"/>
+          </p:cNvSpPr>
+          <p:nvPr>
+            <p:ph type="sldImg" idx="2"/>
+          </p:nvPr>
+        </p:nvSpPr>
+        <p:spPr/>
+      </p:sp>
+      <p:sp>
+        <p:nvSpPr>
+          <p:cNvPr id="3" name="Notes Placeholder 2"/>
+          <p:cNvSpPr>
+            <a:spLocks noGrp="1"/>
+          </p:cNvSpPr>
+          <p:nvPr>
+            <p:ph type="body" idx="3" sz="quarter"/>
+          </p:nvPr>
+        </p:nvSpPr>
+        <p:spPr/>
+        <p:txBody>
+          <a:bodyPr/>
+          <a:lstStyle/>
+          <a:p>
+            <a:r>
               <a:t>Backup only.</a:t>
             </a:r>
           </a:p>
@@ -1351,7 +1422,7 @@
           <a:lstStyle/>
           <a:p>
             <a:r>
-              <a:t>The three numbers are the scope-challenge cases (scope_challenge.json). The honest planning range once the Haugland reconciliation and the unpriced exposures are added back is $48.1 to 58.5M; it is on slide 9, not here, because the question in the room is what can be done, and the answer is the two groups of decisions plus the target.</a:t>
+              <a:t>The three numbers are the scope-challenge cases (scope_challenge.json). The honest planning range once the Haugland reconciliation and the unpriced exposures are added back is $44.5 to 54.8M; it is on slide 9, not here, because the question in the room is what can be done, and the answer is the two groups of decisions plus the target.</a:t>
             </a:r>
           </a:p>
         </p:txBody>
@@ -1631,7 +1702,7 @@
           <a:lstStyle/>
           <a:p>
             <a:r>
-              <a:t>Section 48E storage credit for a utility-owned, 2028 construction start: 30% base with prevailing wage and apprenticeship; prohibited-foreign-entity restrictions phased in by begin-construction date; the IRA added an election out of normalization for storage. Confidence medium on the mechanism (law-firm summaries of the July 2025 reconciliation law and Notice 2026-15), low on the dollars until Tax opines. Research pass of 3 Oct 2026 logged in the research log.</a:t>
+              <a:t>Engineering's proposal was raised on 5 October 2026 after the leadership brief was built. Sizing: the Station 496 Rev 2 estimate ($7.25M on $3.90M of directs, loader 1.86) is entirely the 20-relay program and its loaders; it contains no line for the RTU (Orion+), the SEL RTAC/Axion or the dark-fiber transfer trip, although its clarifications name all three. The allowance of $0.30M to $0.55M direct covers hardware, panel, fiber terminations, 400 to 600 engineering hours, 300 to 500 install hours and 400 to 800 test hours; PM and internal siting hours are retained. Two feeders: half the lines that follow the feeder count (breaker skids, metering transclosures, duct bank to the feeder manholes, riser poles; the cable share at the high end); disconnects are excluded because B5 strikes them. Odds in the simulation: 60% each.</a:t>
             </a:r>
           </a:p>
         </p:txBody>
@@ -1701,7 +1772,7 @@
           <a:lstStyle/>
           <a:p>
             <a:r>
-              <a:t>Target from scope_challenge.json: the reference-class 75th percentile of station-direct $/kWh, rounded to $50. The reference class is the 35 built projects at or below 100 MWh verified on 5 Oct 2026 via EIA-860M and regulator records. The monthly report is the standing item in the containment plan.</a:t>
+              <a:t>Section 48E storage credit for a utility-owned, 2028 construction start: 30% base with prevailing wage and apprenticeship; prohibited-foreign-entity restrictions phased in by begin-construction date; the IRA added an election out of normalization for storage. Confidence medium on the mechanism (law-firm summaries of the July 2025 reconciliation law and Notice 2026-15), low on the dollars until Tax opines. Research pass of 3 Oct 2026 logged in the research log.</a:t>
             </a:r>
           </a:p>
         </p:txBody>
@@ -1771,7 +1842,7 @@
           <a:lstStyle/>
           <a:p>
             <a:r>
-              <a:t>The civil layer (E) and Station 496 (F) carry the widest two-sided accuracy ranges in the integrated Monte Carlo (-$0.9M to +$2.6M and -$1.1M to +$2.0M). A competitive lump-sum converts that range into a contract price. Owner-furnished GSUs and skids match the Siemens budgetary quote of 12 Aug 2026 and the transformer lead-time guidance.</a:t>
+              <a:t>Target from scope_challenge.json: the reference-class 75th percentile of station-direct $/kWh, rounded to $50. The reference class is the 35 built projects at or below 100 MWh verified on 5 Oct 2026 via EIA-860M and regulator records. The monthly report is the standing item in the containment plan.</a:t>
             </a:r>
           </a:p>
         </p:txBody>
@@ -1841,7 +1912,7 @@
           <a:lstStyle/>
           <a:p>
             <a:r>
-              <a:t>Tornado from the integrated Monte Carlo (20,000 trials, mc_scope_schedule.py): each driver's P10 to P90 effect on the loaded total. Variance shares are Spearman contributions to the spread of the managed outcome. The leadership point: the downside is concentrated in two items with owners, the upside is distributed across sixteen items that are mostly decisions.</a:t>
+              <a:t>The civil layer (E) and Station 496 (F) carry the widest two-sided accuracy ranges in the integrated Monte Carlo (-$0.9M to +$2.6M and -$1.1M to +$2.0M). A competitive lump-sum converts that range into a contract price. Owner-furnished GSUs and skids match the Siemens budgetary quote of 12 Aug 2026 and the transformer lead-time guidance.</a:t>
             </a:r>
           </a:p>
         </p:txBody>
@@ -4972,7 +5043,7 @@
                 </a:solidFill>
                 <a:latin typeface="Georgia"/>
               </a:rPr>
-              <a:t>Driving the Hyde Park BESS cost down: $57M to $47M, and who owns each dollar</a:t>
+              <a:t>Driving the Hyde Park BESS cost down: $57M to $43M, and who owns each dollar</a:t>
             </a:r>
           </a:p>
         </p:txBody>
@@ -5014,7 +5085,7 @@
                 </a:solidFill>
                 <a:latin typeface="Calibri"/>
               </a:rPr>
-              <a:t>Sixteen levers, three gates and a design-to-cost target that take Project 21334 from the $57.2M approval level to a $42.4 to 47.3M re-scoped project, with the decisions leadership is asked to make now</a:t>
+              <a:t>Sixteen levers, three gates and a design-to-cost target that take Project 21334 from the $57.2M approval level to a $38.5 to 42.9M re-scoped project, with the decisions leadership is asked to make now</a:t>
             </a:r>
           </a:p>
         </p:txBody>
@@ -5202,7 +5273,7 @@
                 </a:solidFill>
                 <a:latin typeface="Calibri"/>
               </a:rPr>
-              <a:t>SAVE, CONTAIN, REDUCE</a:t>
+              <a:t>WHAT MUST BE MANAGED SO THE SAVINGS STICK</a:t>
             </a:r>
           </a:p>
         </p:txBody>
@@ -5244,7 +5315,7 @@
                 </a:solidFill>
                 <a:latin typeface="Georgia"/>
               </a:rPr>
-              <a:t>The plan on one page: five gates, each with an owner, a date and the dollars it decides</a:t>
+              <a:t>Two risks can eat every dollar saved: the Haugland reconciliation and the siting calendar. Both have an owner and a date.</a:t>
             </a:r>
           </a:p>
         </p:txBody>
@@ -5333,574 +5404,30 @@
           </a:p>
         </p:txBody>
       </p:sp>
-      <p:graphicFrame>
-        <p:nvGraphicFramePr>
-          <p:cNvPr id="7" name="Table 6"/>
-          <p:cNvGraphicFramePr>
-            <a:graphicFrameLocks noGrp="1"/>
-          </p:cNvGraphicFramePr>
+      <p:pic>
+        <p:nvPicPr>
+          <p:cNvPr id="7" name="Picture 6" descr="mc_lead_tornado.png"/>
+          <p:cNvPicPr>
+            <a:picLocks noChangeAspect="1"/>
+          </p:cNvPicPr>
           <p:nvPr/>
-        </p:nvGraphicFramePr>
-        <p:xfrm>
-          <a:off x="548640" y="1371600"/>
-          <a:ext cx="11064240" cy="4572000"/>
-        </p:xfrm>
-        <a:graphic>
-          <a:graphicData uri="http://schemas.openxmlformats.org/drawingml/2006/table">
-            <a:tbl>
-              <a:tblPr firstRow="1" bandRow="1">
-                <a:tableStyleId>{5C22544A-7EE6-4342-B048-85BDC9FD1C3A}</a:tableStyleId>
-              </a:tblPr>
-              <a:tblGrid>
-                <a:gridCol w="1920240"/>
-                <a:gridCol w="5120640"/>
-                <a:gridCol w="1920240"/>
-                <a:gridCol w="2103120"/>
-              </a:tblGrid>
-              <a:tr h="762000">
-                <a:tc>
-                  <a:txBody>
-                    <a:bodyPr/>
-                    <a:lstStyle/>
-                    <a:p>
-                      <a:r>
-                        <a:rPr sz="1100" b="1">
-                          <a:solidFill>
-                            <a:srgbClr val="FFFFFF"/>
-                          </a:solidFill>
-                          <a:latin typeface="Calibri"/>
-                        </a:rPr>
-                        <a:t>When</a:t>
-                      </a:r>
-                    </a:p>
-                  </a:txBody>
-                  <a:tcPr marL="54864" marR="54864" marT="27432" marB="27432">
-                    <a:solidFill>
-                      <a:srgbClr val="001E60"/>
-                    </a:solidFill>
-                  </a:tcPr>
-                </a:tc>
-                <a:tc>
-                  <a:txBody>
-                    <a:bodyPr/>
-                    <a:lstStyle/>
-                    <a:p>
-                      <a:r>
-                        <a:rPr sz="1100" b="1">
-                          <a:solidFill>
-                            <a:srgbClr val="FFFFFF"/>
-                          </a:solidFill>
-                          <a:latin typeface="Calibri"/>
-                        </a:rPr>
-                        <a:t>What</a:t>
-                      </a:r>
-                    </a:p>
-                  </a:txBody>
-                  <a:tcPr marL="54864" marR="54864" marT="27432" marB="27432">
-                    <a:solidFill>
-                      <a:srgbClr val="001E60"/>
-                    </a:solidFill>
-                  </a:tcPr>
-                </a:tc>
-                <a:tc>
-                  <a:txBody>
-                    <a:bodyPr/>
-                    <a:lstStyle/>
-                    <a:p>
-                      <a:r>
-                        <a:rPr sz="1100" b="1">
-                          <a:solidFill>
-                            <a:srgbClr val="FFFFFF"/>
-                          </a:solidFill>
-                          <a:latin typeface="Calibri"/>
-                        </a:rPr>
-                        <a:t>Who</a:t>
-                      </a:r>
-                    </a:p>
-                  </a:txBody>
-                  <a:tcPr marL="54864" marR="54864" marT="27432" marB="27432">
-                    <a:solidFill>
-                      <a:srgbClr val="001E60"/>
-                    </a:solidFill>
-                  </a:tcPr>
-                </a:tc>
-                <a:tc>
-                  <a:txBody>
-                    <a:bodyPr/>
-                    <a:lstStyle/>
-                    <a:p>
-                      <a:r>
-                        <a:rPr sz="1100" b="1">
-                          <a:solidFill>
-                            <a:srgbClr val="FFFFFF"/>
-                          </a:solidFill>
-                          <a:latin typeface="Calibri"/>
-                        </a:rPr>
-                        <a:t>What it decides</a:t>
-                      </a:r>
-                    </a:p>
-                  </a:txBody>
-                  <a:tcPr marL="54864" marR="54864" marT="27432" marB="27432">
-                    <a:solidFill>
-                      <a:srgbClr val="001E60"/>
-                    </a:solidFill>
-                  </a:tcPr>
-                </a:tc>
-              </a:tr>
-              <a:tr h="762000">
-                <a:tc>
-                  <a:txBody>
-                    <a:bodyPr/>
-                    <a:lstStyle/>
-                    <a:p>
-                      <a:r>
-                        <a:rPr sz="1100" b="0">
-                          <a:solidFill>
-                            <a:srgbClr val="1F2A44"/>
-                          </a:solidFill>
-                          <a:latin typeface="Calibri"/>
-                        </a:rPr>
-                        <a:t>Now to the Nov 2026 PAF</a:t>
-                      </a:r>
-                    </a:p>
-                  </a:txBody>
-                  <a:tcPr marL="54864" marR="54864" marT="27432" marB="27432" anchor="ctr">
-                    <a:solidFill>
-                      <a:srgbClr val="FFFFFF"/>
-                    </a:solidFill>
-                  </a:tcPr>
-                </a:tc>
-                <a:tc>
-                  <a:txBody>
-                    <a:bodyPr/>
-                    <a:lstStyle/>
-                    <a:p>
-                      <a:r>
-                        <a:rPr sz="1100" b="0">
-                          <a:solidFill>
-                            <a:srgbClr val="1F2A44"/>
-                          </a:solidFill>
-                          <a:latin typeface="Calibri"/>
-                        </a:rPr>
-                        <a:t>The six no-study decisions (A1, A2, A4, A5, B5, C3); sound mitigation and screening priced or registered; the 48E memo opened with Tax</a:t>
-                      </a:r>
-                    </a:p>
-                  </a:txBody>
-                  <a:tcPr marL="54864" marR="54864" marT="27432" marB="27432" anchor="ctr">
-                    <a:solidFill>
-                      <a:srgbClr val="FFFFFF"/>
-                    </a:solidFill>
-                  </a:tcPr>
-                </a:tc>
-                <a:tc>
-                  <a:txBody>
-                    <a:bodyPr/>
-                    <a:lstStyle/>
-                    <a:p>
-                      <a:r>
-                        <a:rPr sz="1100" b="0">
-                          <a:solidFill>
-                            <a:srgbClr val="1F2A44"/>
-                          </a:solidFill>
-                          <a:latin typeface="Calibri"/>
-                        </a:rPr>
-                        <a:t>Cost Estimating, PM, Accounting, Tax</a:t>
-                      </a:r>
-                    </a:p>
-                  </a:txBody>
-                  <a:tcPr marL="54864" marR="54864" marT="27432" marB="27432" anchor="ctr">
-                    <a:solidFill>
-                      <a:srgbClr val="FFFFFF"/>
-                    </a:solidFill>
-                  </a:tcPr>
-                </a:tc>
-                <a:tc>
-                  <a:txBody>
-                    <a:bodyPr/>
-                    <a:lstStyle/>
-                    <a:p>
-                      <a:r>
-                        <a:rPr sz="1100" b="0">
-                          <a:solidFill>
-                            <a:srgbClr val="1F2A44"/>
-                          </a:solidFill>
-                          <a:latin typeface="Calibri"/>
-                        </a:rPr>
-                        <a:t>Estimate hygiene, about $3M to $5M loaded; the exposures carried honestly</a:t>
-                      </a:r>
-                    </a:p>
-                  </a:txBody>
-                  <a:tcPr marL="54864" marR="54864" marT="27432" marB="27432" anchor="ctr">
-                    <a:solidFill>
-                      <a:srgbClr val="FFFFFF"/>
-                    </a:solidFill>
-                  </a:tcPr>
-                </a:tc>
-              </a:tr>
-              <a:tr h="762000">
-                <a:tc>
-                  <a:txBody>
-                    <a:bodyPr/>
-                    <a:lstStyle/>
-                    <a:p>
-                      <a:r>
-                        <a:rPr sz="1100" b="0">
-                          <a:solidFill>
-                            <a:srgbClr val="1F2A44"/>
-                          </a:solidFill>
-                          <a:latin typeface="Calibri"/>
-                        </a:rPr>
-                        <a:t>Gate 1, design basis (Q1 2027)</a:t>
-                      </a:r>
-                    </a:p>
-                  </a:txBody>
-                  <a:tcPr marL="54864" marR="54864" marT="27432" marB="27432" anchor="ctr">
-                    <a:solidFill>
-                      <a:srgbClr val="F2F4F8"/>
-                    </a:solidFill>
-                  </a:tcPr>
-                </a:tc>
-                <a:tc>
-                  <a:txBody>
-                    <a:bodyPr/>
-                    <a:lstStyle/>
-                    <a:p>
-                      <a:r>
-                        <a:rPr sz="1100" b="0">
-                          <a:solidFill>
-                            <a:srgbClr val="1F2A44"/>
-                          </a:solidFill>
-                          <a:latin typeface="Calibri"/>
-                        </a:rPr>
-                        <a:t>Geotech report; NFPA 855 hazard mitigation analysis; hosting-capacity study for two feeders; GSU count and topology in writing; Haugland-to-Rev 3 scope map signed</a:t>
-                      </a:r>
-                    </a:p>
-                  </a:txBody>
-                  <a:tcPr marL="54864" marR="54864" marT="27432" marB="27432" anchor="ctr">
-                    <a:solidFill>
-                      <a:srgbClr val="F2F4F8"/>
-                    </a:solidFill>
-                  </a:tcPr>
-                </a:tc>
-                <a:tc>
-                  <a:txBody>
-                    <a:bodyPr/>
-                    <a:lstStyle/>
-                    <a:p>
-                      <a:r>
-                        <a:rPr sz="1100" b="0">
-                          <a:solidFill>
-                            <a:srgbClr val="1F2A44"/>
-                          </a:solidFill>
-                          <a:latin typeface="Calibri"/>
-                        </a:rPr>
-                        <a:t>Substation Eng., Civil, System Planning, HEG</a:t>
-                      </a:r>
-                    </a:p>
-                  </a:txBody>
-                  <a:tcPr marL="54864" marR="54864" marT="27432" marB="27432" anchor="ctr">
-                    <a:solidFill>
-                      <a:srgbClr val="F2F4F8"/>
-                    </a:solidFill>
-                  </a:tcPr>
-                </a:tc>
-                <a:tc>
-                  <a:txBody>
-                    <a:bodyPr/>
-                    <a:lstStyle/>
-                    <a:p>
-                      <a:r>
-                        <a:rPr sz="1100" b="0">
-                          <a:solidFill>
-                            <a:srgbClr val="1F2A44"/>
-                          </a:solidFill>
-                          <a:latin typeface="Calibri"/>
-                        </a:rPr>
-                        <a:t>The two-feeder case ($1.4M to $1.9M), the civil layer, the GSU exposure, the Haugland gap</a:t>
-                      </a:r>
-                    </a:p>
-                  </a:txBody>
-                  <a:tcPr marL="54864" marR="54864" marT="27432" marB="27432" anchor="ctr">
-                    <a:solidFill>
-                      <a:srgbClr val="F2F4F8"/>
-                    </a:solidFill>
-                  </a:tcPr>
-                </a:tc>
-              </a:tr>
-              <a:tr h="762000">
-                <a:tc>
-                  <a:txBody>
-                    <a:bodyPr/>
-                    <a:lstStyle/>
-                    <a:p>
-                      <a:r>
-                        <a:rPr sz="1100" b="0">
-                          <a:solidFill>
-                            <a:srgbClr val="1F2A44"/>
-                          </a:solidFill>
-                          <a:latin typeface="Calibri"/>
-                        </a:rPr>
-                        <a:t>Gate 2, design-to-cost (before IFC, mid-2027)</a:t>
-                      </a:r>
-                    </a:p>
-                  </a:txBody>
-                  <a:tcPr marL="54864" marR="54864" marT="27432" marB="27432" anchor="ctr">
-                    <a:solidFill>
-                      <a:srgbClr val="FFFFFF"/>
-                    </a:solidFill>
-                  </a:tcPr>
-                </a:tc>
-                <a:tc>
-                  <a:txBody>
-                    <a:bodyPr/>
-                    <a:lstStyle/>
-                    <a:p>
-                      <a:r>
-                        <a:rPr sz="1100" b="0">
-                          <a:solidFill>
-                            <a:srgbClr val="1F2A44"/>
-                          </a:solidFill>
-                          <a:latin typeface="Calibri"/>
-                        </a:rPr>
-                        <a:t>Station-direct target of $1,250 per kWh and $50M loaded; monthly trend review; change control board with the CoE; no scope added without a funded source</a:t>
-                      </a:r>
-                    </a:p>
-                  </a:txBody>
-                  <a:tcPr marL="54864" marR="54864" marT="27432" marB="27432" anchor="ctr">
-                    <a:solidFill>
-                      <a:srgbClr val="FFFFFF"/>
-                    </a:solidFill>
-                  </a:tcPr>
-                </a:tc>
-                <a:tc>
-                  <a:txBody>
-                    <a:bodyPr/>
-                    <a:lstStyle/>
-                    <a:p>
-                      <a:r>
-                        <a:rPr sz="1100" b="0">
-                          <a:solidFill>
-                            <a:srgbClr val="1F2A44"/>
-                          </a:solidFill>
-                          <a:latin typeface="Calibri"/>
-                        </a:rPr>
-                        <a:t>PM (accountable), Cost Estimating, sponsor</a:t>
-                      </a:r>
-                    </a:p>
-                  </a:txBody>
-                  <a:tcPr marL="54864" marR="54864" marT="27432" marB="27432" anchor="ctr">
-                    <a:solidFill>
-                      <a:srgbClr val="FFFFFF"/>
-                    </a:solidFill>
-                  </a:tcPr>
-                </a:tc>
-                <a:tc>
-                  <a:txBody>
-                    <a:bodyPr/>
-                    <a:lstStyle/>
-                    <a:p>
-                      <a:r>
-                        <a:rPr sz="1100" b="0">
-                          <a:solidFill>
-                            <a:srgbClr val="1F2A44"/>
-                          </a:solidFill>
-                          <a:latin typeface="Calibri"/>
-                        </a:rPr>
-                        <a:t>Turns the estimate into a managed number instead of a forecast</a:t>
-                      </a:r>
-                    </a:p>
-                  </a:txBody>
-                  <a:tcPr marL="54864" marR="54864" marT="27432" marB="27432" anchor="ctr">
-                    <a:solidFill>
-                      <a:srgbClr val="FFFFFF"/>
-                    </a:solidFill>
-                  </a:tcPr>
-                </a:tc>
-              </a:tr>
-              <a:tr h="762000">
-                <a:tc>
-                  <a:txBody>
-                    <a:bodyPr/>
-                    <a:lstStyle/>
-                    <a:p>
-                      <a:r>
-                        <a:rPr sz="1100" b="0">
-                          <a:solidFill>
-                            <a:srgbClr val="1F2A44"/>
-                          </a:solidFill>
-                          <a:latin typeface="Calibri"/>
-                        </a:rPr>
-                        <a:t>Gate 3, commercial strategy (Q3 2027)</a:t>
-                      </a:r>
-                    </a:p>
-                  </a:txBody>
-                  <a:tcPr marL="54864" marR="54864" marT="27432" marB="27432" anchor="ctr">
-                    <a:solidFill>
-                      <a:srgbClr val="F2F4F8"/>
-                    </a:solidFill>
-                  </a:tcPr>
-                </a:tc>
-                <a:tc>
-                  <a:txBody>
-                    <a:bodyPr/>
-                    <a:lstStyle/>
-                    <a:p>
-                      <a:r>
-                        <a:rPr sz="1100" b="0">
-                          <a:solidFill>
-                            <a:srgbClr val="1F2A44"/>
-                          </a:solidFill>
-                          <a:latin typeface="Calibri"/>
-                        </a:rPr>
-                        <a:t>Competitive lump-sum pricing for station, civil and install (Haugland plus two); owner-furnished GSUs and skids; Nomad milestones aligned to delivery; change-order cap; Station 496 outage windows priced</a:t>
-                      </a:r>
-                    </a:p>
-                  </a:txBody>
-                  <a:tcPr marL="54864" marR="54864" marT="27432" marB="27432" anchor="ctr">
-                    <a:solidFill>
-                      <a:srgbClr val="F2F4F8"/>
-                    </a:solidFill>
-                  </a:tcPr>
-                </a:tc>
-                <a:tc>
-                  <a:txBody>
-                    <a:bodyPr/>
-                    <a:lstStyle/>
-                    <a:p>
-                      <a:r>
-                        <a:rPr sz="1100" b="0">
-                          <a:solidFill>
-                            <a:srgbClr val="1F2A44"/>
-                          </a:solidFill>
-                          <a:latin typeface="Calibri"/>
-                        </a:rPr>
-                        <a:t>Sourcing, PM, Construction</a:t>
-                      </a:r>
-                    </a:p>
-                  </a:txBody>
-                  <a:tcPr marL="54864" marR="54864" marT="27432" marB="27432" anchor="ctr">
-                    <a:solidFill>
-                      <a:srgbClr val="F2F4F8"/>
-                    </a:solidFill>
-                  </a:tcPr>
-                </a:tc>
-                <a:tc>
-                  <a:txBody>
-                    <a:bodyPr/>
-                    <a:lstStyle/>
-                    <a:p>
-                      <a:r>
-                        <a:rPr sz="1100" b="0">
-                          <a:solidFill>
-                            <a:srgbClr val="1F2A44"/>
-                          </a:solidFill>
-                          <a:latin typeface="Calibri"/>
-                        </a:rPr>
-                        <a:t>Converts unit-library construction into a bid; retires the +25% construction stress test</a:t>
-                      </a:r>
-                    </a:p>
-                  </a:txBody>
-                  <a:tcPr marL="54864" marR="54864" marT="27432" marB="27432" anchor="ctr">
-                    <a:solidFill>
-                      <a:srgbClr val="F2F4F8"/>
-                    </a:solidFill>
-                  </a:tcPr>
-                </a:tc>
-              </a:tr>
-              <a:tr h="762000">
-                <a:tc>
-                  <a:txBody>
-                    <a:bodyPr/>
-                    <a:lstStyle/>
-                    <a:p>
-                      <a:r>
-                        <a:rPr sz="1100" b="0">
-                          <a:solidFill>
-                            <a:srgbClr val="1F2A44"/>
-                          </a:solidFill>
-                          <a:latin typeface="Calibri"/>
-                        </a:rPr>
-                        <a:t>Standing, monthly to in-service</a:t>
-                      </a:r>
-                    </a:p>
-                  </a:txBody>
-                  <a:tcPr marL="54864" marR="54864" marT="27432" marB="27432" anchor="ctr">
-                    <a:solidFill>
-                      <a:srgbClr val="FFFFFF"/>
-                    </a:solidFill>
-                  </a:tcPr>
-                </a:tc>
-                <a:tc>
-                  <a:txBody>
-                    <a:bodyPr/>
-                    <a:lstStyle/>
-                    <a:p>
-                      <a:r>
-                        <a:rPr sz="1100" b="0">
-                          <a:solidFill>
-                            <a:srgbClr val="1F2A44"/>
-                          </a:solidFill>
-                          <a:latin typeface="Calibri"/>
-                        </a:rPr>
-                        <a:t>One-page cost-containment report: station-direct $/kWh against target, forecast at completion, open scope questions, exposures register, the 48E and FEOC milestones</a:t>
-                      </a:r>
-                    </a:p>
-                  </a:txBody>
-                  <a:tcPr marL="54864" marR="54864" marT="27432" marB="27432" anchor="ctr">
-                    <a:solidFill>
-                      <a:srgbClr val="FFFFFF"/>
-                    </a:solidFill>
-                  </a:tcPr>
-                </a:tc>
-                <a:tc>
-                  <a:txBody>
-                    <a:bodyPr/>
-                    <a:lstStyle/>
-                    <a:p>
-                      <a:r>
-                        <a:rPr sz="1100" b="0">
-                          <a:solidFill>
-                            <a:srgbClr val="1F2A44"/>
-                          </a:solidFill>
-                          <a:latin typeface="Calibri"/>
-                        </a:rPr>
-                        <a:t>PM, CoE</a:t>
-                      </a:r>
-                    </a:p>
-                  </a:txBody>
-                  <a:tcPr marL="54864" marR="54864" marT="27432" marB="27432" anchor="ctr">
-                    <a:solidFill>
-                      <a:srgbClr val="FFFFFF"/>
-                    </a:solidFill>
-                  </a:tcPr>
-                </a:tc>
-                <a:tc>
-                  <a:txBody>
-                    <a:bodyPr/>
-                    <a:lstStyle/>
-                    <a:p>
-                      <a:r>
-                        <a:rPr sz="1100" b="0">
-                          <a:solidFill>
-                            <a:srgbClr val="1F2A44"/>
-                          </a:solidFill>
-                          <a:latin typeface="Calibri"/>
-                        </a:rPr>
-                        <a:t>What leadership sees every month</a:t>
-                      </a:r>
-                    </a:p>
-                  </a:txBody>
-                  <a:tcPr marL="54864" marR="54864" marT="27432" marB="27432" anchor="ctr">
-                    <a:solidFill>
-                      <a:srgbClr val="FFFFFF"/>
-                    </a:solidFill>
-                  </a:tcPr>
-                </a:tc>
-              </a:tr>
-            </a:tbl>
-          </a:graphicData>
-        </a:graphic>
-      </p:graphicFrame>
+        </p:nvPicPr>
+        <p:blipFill>
+          <a:blip r:embed="rId2"/>
+          <a:stretch>
+            <a:fillRect/>
+          </a:stretch>
+        </p:blipFill>
+        <p:spPr>
+          <a:xfrm>
+            <a:off x="365760" y="1371600"/>
+            <a:ext cx="6766560" cy="4446597"/>
+          </a:xfrm>
+          <a:prstGeom prst="rect">
+            <a:avLst/>
+          </a:prstGeom>
+        </p:spPr>
+      </p:pic>
       <p:sp>
         <p:nvSpPr>
           <p:cNvPr id="8" name="TextBox 7"/>
@@ -5909,8 +5436,8 @@
         </p:nvSpPr>
         <p:spPr>
           <a:xfrm>
-            <a:off x="548640" y="6035040"/>
-            <a:ext cx="11064240" cy="320040"/>
+            <a:off x="7315200" y="1417320"/>
+            <a:ext cx="4389120" cy="4937760"/>
           </a:xfrm>
           <a:prstGeom prst="rect">
             <a:avLst/>
@@ -5918,27 +5445,193 @@
           <a:noFill/>
         </p:spPr>
         <p:txBody>
-          <a:bodyPr wrap="square" lIns="45720" rIns="45720" tIns="27432" bIns="27432" anchor="t">
+          <a:bodyPr wrap="square" lIns="45720">
             <a:spAutoFit/>
           </a:bodyPr>
           <a:lstStyle/>
           <a:p>
-            <a:pPr algn="l">
+            <a:pPr>
               <a:lnSpc>
                 <a:spcPct val="105000"/>
               </a:lnSpc>
               <a:spcAft>
-                <a:spcPts val="400"/>
+                <a:spcPts val="700"/>
               </a:spcAft>
             </a:pPr>
             <a:r>
-              <a:rPr sz="1100" b="0" i="0">
+              <a:rPr sz="1200">
                 <a:solidFill>
-                  <a:srgbClr val="6B7280"/>
+                  <a:srgbClr val="FFC72C"/>
                 </a:solidFill>
                 <a:latin typeface="Calibri"/>
               </a:rPr>
-              <a:t>Target: $1,250 per kWh station-direct ($25M direct, $50M loaded); the CoE reports the trend monthly from the November 2026 PAF.</a:t>
+              <a:t>▪  </a:t>
+            </a:r>
+            <a:r>
+              <a:rPr b="1" sz="1200">
+                <a:solidFill>
+                  <a:srgbClr val="1F2A44"/>
+                </a:solidFill>
+                <a:latin typeface="Calibri"/>
+              </a:rPr>
+              <a:t>Haugland reconciliation, +$4 to 8M direct, 43% of the variance. </a:t>
+            </a:r>
+            <a:r>
+              <a:rPr sz="1200">
+                <a:solidFill>
+                  <a:srgbClr val="1F2A44"/>
+                </a:solidFill>
+                <a:latin typeface="Calibri"/>
+              </a:rPr>
+              <a:t>Haugland's Class 3 base for overlapping scope is $19.2M; Rev 3 carries $8.3M. Until a signed scope map says which is right, every saving on slides 4 and 5 is provisional. Owner: PM + Cost Estimating + HEG. By: before the November PAF.</a:t>
+            </a:r>
+          </a:p>
+          <a:p>
+            <a:pPr>
+              <a:lnSpc>
+                <a:spcPct val="105000"/>
+              </a:lnSpc>
+              <a:spcAft>
+                <a:spcPts val="700"/>
+              </a:spcAft>
+            </a:pPr>
+            <a:r>
+              <a:rPr sz="1200">
+                <a:solidFill>
+                  <a:srgbClr val="FFC72C"/>
+                </a:solidFill>
+                <a:latin typeface="Calibri"/>
+              </a:rPr>
+              <a:t>▪  </a:t>
+            </a:r>
+            <a:r>
+              <a:rPr b="1" sz="1200">
+                <a:solidFill>
+                  <a:srgbClr val="1F2A44"/>
+                </a:solidFill>
+                <a:latin typeface="Calibri"/>
+              </a:rPr>
+              <a:t>Siting schedule, +5 months at P50, +9 at P80, 11% of the variance. </a:t>
+            </a:r>
+            <a:r>
+              <a:rPr sz="1200">
+                <a:solidFill>
+                  <a:srgbClr val="1F2A44"/>
+                </a:solidFill>
+                <a:latin typeface="Calibri"/>
+              </a:rPr>
+              <a:t>Every month costs about $0.37M in AFUDC, escalation and PM. Action: file Article 80 early, pre-brief the abutters on screening and sound, set the ZBA date within 90 days of filing. Owner: Siting + PM. By: Q1 2027.</a:t>
+            </a:r>
+          </a:p>
+          <a:p>
+            <a:pPr>
+              <a:lnSpc>
+                <a:spcPct val="105000"/>
+              </a:lnSpc>
+              <a:spcAft>
+                <a:spcPts val="700"/>
+              </a:spcAft>
+            </a:pPr>
+            <a:r>
+              <a:rPr sz="1200">
+                <a:solidFill>
+                  <a:srgbClr val="FFC72C"/>
+                </a:solidFill>
+                <a:latin typeface="Calibri"/>
+              </a:rPr>
+              <a:t>▪  </a:t>
+            </a:r>
+            <a:r>
+              <a:rPr b="1" sz="1200">
+                <a:solidFill>
+                  <a:srgbClr val="1F2A44"/>
+                </a:solidFill>
+                <a:latin typeface="Calibri"/>
+              </a:rPr>
+              <a:t>Station 496 is now the second driver, 26% of the variance. </a:t>
+            </a:r>
+            <a:r>
+              <a:rPr sz="1200">
+                <a:solidFill>
+                  <a:srgbClr val="1F2A44"/>
+                </a:solidFill>
+                <a:latin typeface="Calibri"/>
+              </a:rPr>
+              <a:t>A $6M swing that turns on one protection-basis memo; until it is signed the number has two modes.</a:t>
+            </a:r>
+          </a:p>
+          <a:p>
+            <a:pPr>
+              <a:lnSpc>
+                <a:spcPct val="105000"/>
+              </a:lnSpc>
+              <a:spcAft>
+                <a:spcPts val="700"/>
+              </a:spcAft>
+            </a:pPr>
+            <a:r>
+              <a:rPr sz="1200">
+                <a:solidFill>
+                  <a:srgbClr val="FFC72C"/>
+                </a:solidFill>
+                <a:latin typeface="Calibri"/>
+              </a:rPr>
+              <a:t>▪  </a:t>
+            </a:r>
+            <a:r>
+              <a:rPr b="1" sz="1200">
+                <a:solidFill>
+                  <a:srgbClr val="1F2A44"/>
+                </a:solidFill>
+                <a:latin typeface="Calibri"/>
+              </a:rPr>
+              <a:t>Exposures to carry honestly, $2.0 to 3.9M. </a:t>
+            </a:r>
+            <a:r>
+              <a:rPr sz="1200">
+                <a:solidFill>
+                  <a:srgbClr val="1F2A44"/>
+                </a:solidFill>
+                <a:latin typeface="Calibri"/>
+              </a:rPr>
+              <a:t>Sound mitigation ($467K dropped from the 2023 estimate), visual screening, police details, NFPA 855 changes, the GSU count. Price them now; a surprise in 2028 costs more than a line today.</a:t>
+            </a:r>
+          </a:p>
+          <a:p>
+            <a:pPr>
+              <a:lnSpc>
+                <a:spcPct val="105000"/>
+              </a:lnSpc>
+              <a:spcAft>
+                <a:spcPts val="700"/>
+              </a:spcAft>
+            </a:pPr>
+            <a:r>
+              <a:rPr sz="1200">
+                <a:solidFill>
+                  <a:srgbClr val="FFC72C"/>
+                </a:solidFill>
+                <a:latin typeface="Calibri"/>
+              </a:rPr>
+              <a:t>▪  </a:t>
+            </a:r>
+            <a:r>
+              <a:rPr b="1" sz="1200">
+                <a:solidFill>
+                  <a:srgbClr val="1F2A44"/>
+                </a:solidFill>
+                <a:latin typeface="Calibri"/>
+              </a:rPr>
+              <a:t>Everything on the left is ours to take. </a:t>
+            </a:r>
+            <a:r>
+              <a:rPr sz="1200">
+                <a:solidFill>
+                  <a:srgbClr val="1F2A44"/>
+                </a:solidFill>
+                <a:latin typeface="Calibri"/>
+              </a:rPr>
+              <a:t>No single lever exceeds $2M; together they are worth about $9.9M at the assessed odds and $16.8M if every one lands.</a:t>
             </a:r>
           </a:p>
         </p:txBody>
@@ -6042,7 +5735,7 @@
                 </a:solidFill>
                 <a:latin typeface="Calibri"/>
               </a:rPr>
-              <a:t>20,000 TRIALS ON COST, SCOPE AND SCHEDULE</a:t>
+              <a:t>SAVE, CONTAIN, REDUCE</a:t>
             </a:r>
           </a:p>
         </p:txBody>
@@ -6084,7 +5777,7 @@
                 </a:solidFill>
                 <a:latin typeface="Georgia"/>
               </a:rPr>
-              <a:t>What the plan is worth: $6.4M at the median if the levers are worked at their odds, $11.8M if every one lands</a:t>
+              <a:t>The plan on one page: five gates, each with an owner, a date and the dollars it decides</a:t>
             </a:r>
           </a:p>
         </p:txBody>
@@ -6169,6 +5862,846 @@
                 <a:latin typeface="Calibri"/>
               </a:rPr>
               <a:t>11</a:t>
+            </a:r>
+          </a:p>
+        </p:txBody>
+      </p:sp>
+      <p:graphicFrame>
+        <p:nvGraphicFramePr>
+          <p:cNvPr id="7" name="Table 6"/>
+          <p:cNvGraphicFramePr>
+            <a:graphicFrameLocks noGrp="1"/>
+          </p:cNvGraphicFramePr>
+          <p:nvPr/>
+        </p:nvGraphicFramePr>
+        <p:xfrm>
+          <a:off x="548640" y="1371600"/>
+          <a:ext cx="11064240" cy="4572000"/>
+        </p:xfrm>
+        <a:graphic>
+          <a:graphicData uri="http://schemas.openxmlformats.org/drawingml/2006/table">
+            <a:tbl>
+              <a:tblPr firstRow="1" bandRow="1">
+                <a:tableStyleId>{5C22544A-7EE6-4342-B048-85BDC9FD1C3A}</a:tableStyleId>
+              </a:tblPr>
+              <a:tblGrid>
+                <a:gridCol w="1920240"/>
+                <a:gridCol w="5120640"/>
+                <a:gridCol w="1920240"/>
+                <a:gridCol w="2103120"/>
+              </a:tblGrid>
+              <a:tr h="762000">
+                <a:tc>
+                  <a:txBody>
+                    <a:bodyPr/>
+                    <a:lstStyle/>
+                    <a:p>
+                      <a:r>
+                        <a:rPr sz="1100" b="1">
+                          <a:solidFill>
+                            <a:srgbClr val="FFFFFF"/>
+                          </a:solidFill>
+                          <a:latin typeface="Calibri"/>
+                        </a:rPr>
+                        <a:t>When</a:t>
+                      </a:r>
+                    </a:p>
+                  </a:txBody>
+                  <a:tcPr marL="54864" marR="54864" marT="27432" marB="27432">
+                    <a:solidFill>
+                      <a:srgbClr val="001E60"/>
+                    </a:solidFill>
+                  </a:tcPr>
+                </a:tc>
+                <a:tc>
+                  <a:txBody>
+                    <a:bodyPr/>
+                    <a:lstStyle/>
+                    <a:p>
+                      <a:r>
+                        <a:rPr sz="1100" b="1">
+                          <a:solidFill>
+                            <a:srgbClr val="FFFFFF"/>
+                          </a:solidFill>
+                          <a:latin typeface="Calibri"/>
+                        </a:rPr>
+                        <a:t>What</a:t>
+                      </a:r>
+                    </a:p>
+                  </a:txBody>
+                  <a:tcPr marL="54864" marR="54864" marT="27432" marB="27432">
+                    <a:solidFill>
+                      <a:srgbClr val="001E60"/>
+                    </a:solidFill>
+                  </a:tcPr>
+                </a:tc>
+                <a:tc>
+                  <a:txBody>
+                    <a:bodyPr/>
+                    <a:lstStyle/>
+                    <a:p>
+                      <a:r>
+                        <a:rPr sz="1100" b="1">
+                          <a:solidFill>
+                            <a:srgbClr val="FFFFFF"/>
+                          </a:solidFill>
+                          <a:latin typeface="Calibri"/>
+                        </a:rPr>
+                        <a:t>Who</a:t>
+                      </a:r>
+                    </a:p>
+                  </a:txBody>
+                  <a:tcPr marL="54864" marR="54864" marT="27432" marB="27432">
+                    <a:solidFill>
+                      <a:srgbClr val="001E60"/>
+                    </a:solidFill>
+                  </a:tcPr>
+                </a:tc>
+                <a:tc>
+                  <a:txBody>
+                    <a:bodyPr/>
+                    <a:lstStyle/>
+                    <a:p>
+                      <a:r>
+                        <a:rPr sz="1100" b="1">
+                          <a:solidFill>
+                            <a:srgbClr val="FFFFFF"/>
+                          </a:solidFill>
+                          <a:latin typeface="Calibri"/>
+                        </a:rPr>
+                        <a:t>What it decides</a:t>
+                      </a:r>
+                    </a:p>
+                  </a:txBody>
+                  <a:tcPr marL="54864" marR="54864" marT="27432" marB="27432">
+                    <a:solidFill>
+                      <a:srgbClr val="001E60"/>
+                    </a:solidFill>
+                  </a:tcPr>
+                </a:tc>
+              </a:tr>
+              <a:tr h="762000">
+                <a:tc>
+                  <a:txBody>
+                    <a:bodyPr/>
+                    <a:lstStyle/>
+                    <a:p>
+                      <a:r>
+                        <a:rPr sz="1100" b="0">
+                          <a:solidFill>
+                            <a:srgbClr val="1F2A44"/>
+                          </a:solidFill>
+                          <a:latin typeface="Calibri"/>
+                        </a:rPr>
+                        <a:t>Now to the Nov 2026 PAF</a:t>
+                      </a:r>
+                    </a:p>
+                  </a:txBody>
+                  <a:tcPr marL="54864" marR="54864" marT="27432" marB="27432" anchor="ctr">
+                    <a:solidFill>
+                      <a:srgbClr val="FFFFFF"/>
+                    </a:solidFill>
+                  </a:tcPr>
+                </a:tc>
+                <a:tc>
+                  <a:txBody>
+                    <a:bodyPr/>
+                    <a:lstStyle/>
+                    <a:p>
+                      <a:r>
+                        <a:rPr sz="1100" b="0">
+                          <a:solidFill>
+                            <a:srgbClr val="1F2A44"/>
+                          </a:solidFill>
+                          <a:latin typeface="Calibri"/>
+                        </a:rPr>
+                        <a:t>The six no-study decisions (A1, A2, A4, A5, B5, C3); sound mitigation and screening priced or registered; the 48E memo opened with Tax</a:t>
+                      </a:r>
+                    </a:p>
+                  </a:txBody>
+                  <a:tcPr marL="54864" marR="54864" marT="27432" marB="27432" anchor="ctr">
+                    <a:solidFill>
+                      <a:srgbClr val="FFFFFF"/>
+                    </a:solidFill>
+                  </a:tcPr>
+                </a:tc>
+                <a:tc>
+                  <a:txBody>
+                    <a:bodyPr/>
+                    <a:lstStyle/>
+                    <a:p>
+                      <a:r>
+                        <a:rPr sz="1100" b="0">
+                          <a:solidFill>
+                            <a:srgbClr val="1F2A44"/>
+                          </a:solidFill>
+                          <a:latin typeface="Calibri"/>
+                        </a:rPr>
+                        <a:t>Cost Estimating, PM, Accounting, Tax</a:t>
+                      </a:r>
+                    </a:p>
+                  </a:txBody>
+                  <a:tcPr marL="54864" marR="54864" marT="27432" marB="27432" anchor="ctr">
+                    <a:solidFill>
+                      <a:srgbClr val="FFFFFF"/>
+                    </a:solidFill>
+                  </a:tcPr>
+                </a:tc>
+                <a:tc>
+                  <a:txBody>
+                    <a:bodyPr/>
+                    <a:lstStyle/>
+                    <a:p>
+                      <a:r>
+                        <a:rPr sz="1100" b="0">
+                          <a:solidFill>
+                            <a:srgbClr val="1F2A44"/>
+                          </a:solidFill>
+                          <a:latin typeface="Calibri"/>
+                        </a:rPr>
+                        <a:t>Estimate hygiene, about $3M to $5M loaded; the exposures carried honestly</a:t>
+                      </a:r>
+                    </a:p>
+                  </a:txBody>
+                  <a:tcPr marL="54864" marR="54864" marT="27432" marB="27432" anchor="ctr">
+                    <a:solidFill>
+                      <a:srgbClr val="FFFFFF"/>
+                    </a:solidFill>
+                  </a:tcPr>
+                </a:tc>
+              </a:tr>
+              <a:tr h="762000">
+                <a:tc>
+                  <a:txBody>
+                    <a:bodyPr/>
+                    <a:lstStyle/>
+                    <a:p>
+                      <a:r>
+                        <a:rPr sz="1100" b="0">
+                          <a:solidFill>
+                            <a:srgbClr val="1F2A44"/>
+                          </a:solidFill>
+                          <a:latin typeface="Calibri"/>
+                        </a:rPr>
+                        <a:t>Gate 1, design basis (Q1 2027)</a:t>
+                      </a:r>
+                    </a:p>
+                  </a:txBody>
+                  <a:tcPr marL="54864" marR="54864" marT="27432" marB="27432" anchor="ctr">
+                    <a:solidFill>
+                      <a:srgbClr val="F2F4F8"/>
+                    </a:solidFill>
+                  </a:tcPr>
+                </a:tc>
+                <a:tc>
+                  <a:txBody>
+                    <a:bodyPr/>
+                    <a:lstStyle/>
+                    <a:p>
+                      <a:r>
+                        <a:rPr sz="1100" b="0">
+                          <a:solidFill>
+                            <a:srgbClr val="1F2A44"/>
+                          </a:solidFill>
+                          <a:latin typeface="Calibri"/>
+                        </a:rPr>
+                        <a:t>Geotech report; NFPA 855 hazard mitigation analysis; hosting-capacity and protection study at 5 MW per feeder; Station 496 protection-basis memo; GSU count and topology in writing; Haugland-to-Rev 3 scope map signed</a:t>
+                      </a:r>
+                    </a:p>
+                  </a:txBody>
+                  <a:tcPr marL="54864" marR="54864" marT="27432" marB="27432" anchor="ctr">
+                    <a:solidFill>
+                      <a:srgbClr val="F2F4F8"/>
+                    </a:solidFill>
+                  </a:tcPr>
+                </a:tc>
+                <a:tc>
+                  <a:txBody>
+                    <a:bodyPr/>
+                    <a:lstStyle/>
+                    <a:p>
+                      <a:r>
+                        <a:rPr sz="1100" b="0">
+                          <a:solidFill>
+                            <a:srgbClr val="1F2A44"/>
+                          </a:solidFill>
+                          <a:latin typeface="Calibri"/>
+                        </a:rPr>
+                        <a:t>Substation Eng., Civil, System Planning, System Protection, HEG</a:t>
+                      </a:r>
+                    </a:p>
+                  </a:txBody>
+                  <a:tcPr marL="54864" marR="54864" marT="27432" marB="27432" anchor="ctr">
+                    <a:solidFill>
+                      <a:srgbClr val="F2F4F8"/>
+                    </a:solidFill>
+                  </a:tcPr>
+                </a:tc>
+                <a:tc>
+                  <a:txBody>
+                    <a:bodyPr/>
+                    <a:lstStyle/>
+                    <a:p>
+                      <a:r>
+                        <a:rPr sz="1100" b="0">
+                          <a:solidFill>
+                            <a:srgbClr val="1F2A44"/>
+                          </a:solidFill>
+                          <a:latin typeface="Calibri"/>
+                        </a:rPr>
+                        <a:t>The Station 496 case ($6.1 to 6.6M), the two-feeder case ($1.5 to 1.7M), the civil layer, the GSU exposure, the Haugland gap</a:t>
+                      </a:r>
+                    </a:p>
+                  </a:txBody>
+                  <a:tcPr marL="54864" marR="54864" marT="27432" marB="27432" anchor="ctr">
+                    <a:solidFill>
+                      <a:srgbClr val="F2F4F8"/>
+                    </a:solidFill>
+                  </a:tcPr>
+                </a:tc>
+              </a:tr>
+              <a:tr h="762000">
+                <a:tc>
+                  <a:txBody>
+                    <a:bodyPr/>
+                    <a:lstStyle/>
+                    <a:p>
+                      <a:r>
+                        <a:rPr sz="1100" b="0">
+                          <a:solidFill>
+                            <a:srgbClr val="1F2A44"/>
+                          </a:solidFill>
+                          <a:latin typeface="Calibri"/>
+                        </a:rPr>
+                        <a:t>Gate 2, design-to-cost (before IFC, mid-2027)</a:t>
+                      </a:r>
+                    </a:p>
+                  </a:txBody>
+                  <a:tcPr marL="54864" marR="54864" marT="27432" marB="27432" anchor="ctr">
+                    <a:solidFill>
+                      <a:srgbClr val="FFFFFF"/>
+                    </a:solidFill>
+                  </a:tcPr>
+                </a:tc>
+                <a:tc>
+                  <a:txBody>
+                    <a:bodyPr/>
+                    <a:lstStyle/>
+                    <a:p>
+                      <a:r>
+                        <a:rPr sz="1100" b="0">
+                          <a:solidFill>
+                            <a:srgbClr val="1F2A44"/>
+                          </a:solidFill>
+                          <a:latin typeface="Calibri"/>
+                        </a:rPr>
+                        <a:t>Station-direct target of $1,250 per kWh and $50M loaded; monthly trend review; change control board with the CoE; no scope added without a funded source</a:t>
+                      </a:r>
+                    </a:p>
+                  </a:txBody>
+                  <a:tcPr marL="54864" marR="54864" marT="27432" marB="27432" anchor="ctr">
+                    <a:solidFill>
+                      <a:srgbClr val="FFFFFF"/>
+                    </a:solidFill>
+                  </a:tcPr>
+                </a:tc>
+                <a:tc>
+                  <a:txBody>
+                    <a:bodyPr/>
+                    <a:lstStyle/>
+                    <a:p>
+                      <a:r>
+                        <a:rPr sz="1100" b="0">
+                          <a:solidFill>
+                            <a:srgbClr val="1F2A44"/>
+                          </a:solidFill>
+                          <a:latin typeface="Calibri"/>
+                        </a:rPr>
+                        <a:t>PM (accountable), Cost Estimating, sponsor</a:t>
+                      </a:r>
+                    </a:p>
+                  </a:txBody>
+                  <a:tcPr marL="54864" marR="54864" marT="27432" marB="27432" anchor="ctr">
+                    <a:solidFill>
+                      <a:srgbClr val="FFFFFF"/>
+                    </a:solidFill>
+                  </a:tcPr>
+                </a:tc>
+                <a:tc>
+                  <a:txBody>
+                    <a:bodyPr/>
+                    <a:lstStyle/>
+                    <a:p>
+                      <a:r>
+                        <a:rPr sz="1100" b="0">
+                          <a:solidFill>
+                            <a:srgbClr val="1F2A44"/>
+                          </a:solidFill>
+                          <a:latin typeface="Calibri"/>
+                        </a:rPr>
+                        <a:t>Turns the estimate into a managed number instead of a forecast</a:t>
+                      </a:r>
+                    </a:p>
+                  </a:txBody>
+                  <a:tcPr marL="54864" marR="54864" marT="27432" marB="27432" anchor="ctr">
+                    <a:solidFill>
+                      <a:srgbClr val="FFFFFF"/>
+                    </a:solidFill>
+                  </a:tcPr>
+                </a:tc>
+              </a:tr>
+              <a:tr h="762000">
+                <a:tc>
+                  <a:txBody>
+                    <a:bodyPr/>
+                    <a:lstStyle/>
+                    <a:p>
+                      <a:r>
+                        <a:rPr sz="1100" b="0">
+                          <a:solidFill>
+                            <a:srgbClr val="1F2A44"/>
+                          </a:solidFill>
+                          <a:latin typeface="Calibri"/>
+                        </a:rPr>
+                        <a:t>Gate 3, commercial strategy (Q3 2027)</a:t>
+                      </a:r>
+                    </a:p>
+                  </a:txBody>
+                  <a:tcPr marL="54864" marR="54864" marT="27432" marB="27432" anchor="ctr">
+                    <a:solidFill>
+                      <a:srgbClr val="F2F4F8"/>
+                    </a:solidFill>
+                  </a:tcPr>
+                </a:tc>
+                <a:tc>
+                  <a:txBody>
+                    <a:bodyPr/>
+                    <a:lstStyle/>
+                    <a:p>
+                      <a:r>
+                        <a:rPr sz="1100" b="0">
+                          <a:solidFill>
+                            <a:srgbClr val="1F2A44"/>
+                          </a:solidFill>
+                          <a:latin typeface="Calibri"/>
+                        </a:rPr>
+                        <a:t>Competitive lump-sum pricing for station, civil and install (Haugland plus two); owner-furnished GSUs and skids; Nomad milestones aligned to delivery; change-order cap; Station 496 outage windows priced</a:t>
+                      </a:r>
+                    </a:p>
+                  </a:txBody>
+                  <a:tcPr marL="54864" marR="54864" marT="27432" marB="27432" anchor="ctr">
+                    <a:solidFill>
+                      <a:srgbClr val="F2F4F8"/>
+                    </a:solidFill>
+                  </a:tcPr>
+                </a:tc>
+                <a:tc>
+                  <a:txBody>
+                    <a:bodyPr/>
+                    <a:lstStyle/>
+                    <a:p>
+                      <a:r>
+                        <a:rPr sz="1100" b="0">
+                          <a:solidFill>
+                            <a:srgbClr val="1F2A44"/>
+                          </a:solidFill>
+                          <a:latin typeface="Calibri"/>
+                        </a:rPr>
+                        <a:t>Sourcing, PM, Construction</a:t>
+                      </a:r>
+                    </a:p>
+                  </a:txBody>
+                  <a:tcPr marL="54864" marR="54864" marT="27432" marB="27432" anchor="ctr">
+                    <a:solidFill>
+                      <a:srgbClr val="F2F4F8"/>
+                    </a:solidFill>
+                  </a:tcPr>
+                </a:tc>
+                <a:tc>
+                  <a:txBody>
+                    <a:bodyPr/>
+                    <a:lstStyle/>
+                    <a:p>
+                      <a:r>
+                        <a:rPr sz="1100" b="0">
+                          <a:solidFill>
+                            <a:srgbClr val="1F2A44"/>
+                          </a:solidFill>
+                          <a:latin typeface="Calibri"/>
+                        </a:rPr>
+                        <a:t>Converts unit-library construction into a bid; retires the +25% construction stress test</a:t>
+                      </a:r>
+                    </a:p>
+                  </a:txBody>
+                  <a:tcPr marL="54864" marR="54864" marT="27432" marB="27432" anchor="ctr">
+                    <a:solidFill>
+                      <a:srgbClr val="F2F4F8"/>
+                    </a:solidFill>
+                  </a:tcPr>
+                </a:tc>
+              </a:tr>
+              <a:tr h="762000">
+                <a:tc>
+                  <a:txBody>
+                    <a:bodyPr/>
+                    <a:lstStyle/>
+                    <a:p>
+                      <a:r>
+                        <a:rPr sz="1100" b="0">
+                          <a:solidFill>
+                            <a:srgbClr val="1F2A44"/>
+                          </a:solidFill>
+                          <a:latin typeface="Calibri"/>
+                        </a:rPr>
+                        <a:t>Standing, monthly to in-service</a:t>
+                      </a:r>
+                    </a:p>
+                  </a:txBody>
+                  <a:tcPr marL="54864" marR="54864" marT="27432" marB="27432" anchor="ctr">
+                    <a:solidFill>
+                      <a:srgbClr val="FFFFFF"/>
+                    </a:solidFill>
+                  </a:tcPr>
+                </a:tc>
+                <a:tc>
+                  <a:txBody>
+                    <a:bodyPr/>
+                    <a:lstStyle/>
+                    <a:p>
+                      <a:r>
+                        <a:rPr sz="1100" b="0">
+                          <a:solidFill>
+                            <a:srgbClr val="1F2A44"/>
+                          </a:solidFill>
+                          <a:latin typeface="Calibri"/>
+                        </a:rPr>
+                        <a:t>One-page cost-containment report: station-direct $/kWh against target, forecast at completion, open scope questions, exposures register, the 48E and FEOC milestones</a:t>
+                      </a:r>
+                    </a:p>
+                  </a:txBody>
+                  <a:tcPr marL="54864" marR="54864" marT="27432" marB="27432" anchor="ctr">
+                    <a:solidFill>
+                      <a:srgbClr val="FFFFFF"/>
+                    </a:solidFill>
+                  </a:tcPr>
+                </a:tc>
+                <a:tc>
+                  <a:txBody>
+                    <a:bodyPr/>
+                    <a:lstStyle/>
+                    <a:p>
+                      <a:r>
+                        <a:rPr sz="1100" b="0">
+                          <a:solidFill>
+                            <a:srgbClr val="1F2A44"/>
+                          </a:solidFill>
+                          <a:latin typeface="Calibri"/>
+                        </a:rPr>
+                        <a:t>PM, CoE</a:t>
+                      </a:r>
+                    </a:p>
+                  </a:txBody>
+                  <a:tcPr marL="54864" marR="54864" marT="27432" marB="27432" anchor="ctr">
+                    <a:solidFill>
+                      <a:srgbClr val="FFFFFF"/>
+                    </a:solidFill>
+                  </a:tcPr>
+                </a:tc>
+                <a:tc>
+                  <a:txBody>
+                    <a:bodyPr/>
+                    <a:lstStyle/>
+                    <a:p>
+                      <a:r>
+                        <a:rPr sz="1100" b="0">
+                          <a:solidFill>
+                            <a:srgbClr val="1F2A44"/>
+                          </a:solidFill>
+                          <a:latin typeface="Calibri"/>
+                        </a:rPr>
+                        <a:t>What leadership sees every month</a:t>
+                      </a:r>
+                    </a:p>
+                  </a:txBody>
+                  <a:tcPr marL="54864" marR="54864" marT="27432" marB="27432" anchor="ctr">
+                    <a:solidFill>
+                      <a:srgbClr val="FFFFFF"/>
+                    </a:solidFill>
+                  </a:tcPr>
+                </a:tc>
+              </a:tr>
+            </a:tbl>
+          </a:graphicData>
+        </a:graphic>
+      </p:graphicFrame>
+      <p:sp>
+        <p:nvSpPr>
+          <p:cNvPr id="8" name="TextBox 7"/>
+          <p:cNvSpPr txBox="1"/>
+          <p:nvPr/>
+        </p:nvSpPr>
+        <p:spPr>
+          <a:xfrm>
+            <a:off x="548640" y="6035040"/>
+            <a:ext cx="11064240" cy="320040"/>
+          </a:xfrm>
+          <a:prstGeom prst="rect">
+            <a:avLst/>
+          </a:prstGeom>
+          <a:noFill/>
+        </p:spPr>
+        <p:txBody>
+          <a:bodyPr wrap="square" lIns="45720" rIns="45720" tIns="27432" bIns="27432" anchor="t">
+            <a:spAutoFit/>
+          </a:bodyPr>
+          <a:lstStyle/>
+          <a:p>
+            <a:pPr algn="l">
+              <a:lnSpc>
+                <a:spcPct val="105000"/>
+              </a:lnSpc>
+              <a:spcAft>
+                <a:spcPts val="400"/>
+              </a:spcAft>
+            </a:pPr>
+            <a:r>
+              <a:rPr sz="1100" b="0" i="0">
+                <a:solidFill>
+                  <a:srgbClr val="6B7280"/>
+                </a:solidFill>
+                <a:latin typeface="Calibri"/>
+              </a:rPr>
+              <a:t>Target: $1,250 per kWh station-direct ($25M direct, $50M loaded); the CoE reports the trend monthly from the November 2026 PAF.</a:t>
+            </a:r>
+          </a:p>
+        </p:txBody>
+      </p:sp>
+    </p:spTree>
+  </p:cSld>
+  <p:clrMapOvr>
+    <a:masterClrMapping/>
+  </p:clrMapOvr>
+</p:sld>
+</file>
+
+<file path=ppt/slides/slide12.xml><?xml version="1.0" encoding="utf-8"?>
+<p:sld xmlns:a="http://schemas.openxmlformats.org/drawingml/2006/main" xmlns:p="http://schemas.openxmlformats.org/presentationml/2006/main" xmlns:r="http://schemas.openxmlformats.org/officeDocument/2006/relationships">
+  <p:cSld>
+    <p:spTree>
+      <p:nvGrpSpPr>
+        <p:cNvPr id="1" name=""/>
+        <p:cNvGrpSpPr/>
+        <p:nvPr/>
+      </p:nvGrpSpPr>
+      <p:grpSpPr/>
+      <p:sp>
+        <p:nvSpPr>
+          <p:cNvPr id="2" name="Rectangle 1"/>
+          <p:cNvSpPr/>
+          <p:nvPr/>
+        </p:nvSpPr>
+        <p:spPr>
+          <a:xfrm>
+            <a:off x="0" y="0"/>
+            <a:ext cx="12191695" cy="6858000"/>
+          </a:xfrm>
+          <a:prstGeom prst="rect">
+            <a:avLst/>
+          </a:prstGeom>
+          <a:solidFill>
+            <a:srgbClr val="FFFFFF"/>
+          </a:solidFill>
+          <a:ln>
+            <a:noFill/>
+          </a:ln>
+          <a:effectLst/>
+        </p:spPr>
+        <p:style>
+          <a:lnRef idx="1">
+            <a:schemeClr val="accent1"/>
+          </a:lnRef>
+          <a:fillRef idx="3">
+            <a:schemeClr val="accent1"/>
+          </a:fillRef>
+          <a:effectRef idx="2">
+            <a:schemeClr val="accent1"/>
+          </a:effectRef>
+          <a:fontRef idx="minor">
+            <a:schemeClr val="lt1"/>
+          </a:fontRef>
+        </p:style>
+        <p:txBody>
+          <a:bodyPr rtlCol="0" anchor="ctr"/>
+          <a:lstStyle/>
+          <a:p>
+            <a:pPr algn="ctr"/>
+          </a:p>
+        </p:txBody>
+      </p:sp>
+      <p:sp>
+        <p:nvSpPr>
+          <p:cNvPr id="3" name="TextBox 2"/>
+          <p:cNvSpPr txBox="1"/>
+          <p:nvPr/>
+        </p:nvSpPr>
+        <p:spPr>
+          <a:xfrm>
+            <a:off x="548640" y="256032"/>
+            <a:ext cx="11064240" cy="274320"/>
+          </a:xfrm>
+          <a:prstGeom prst="rect">
+            <a:avLst/>
+          </a:prstGeom>
+          <a:noFill/>
+        </p:spPr>
+        <p:txBody>
+          <a:bodyPr wrap="square" lIns="45720" rIns="45720" tIns="27432" bIns="27432" anchor="t">
+            <a:spAutoFit/>
+          </a:bodyPr>
+          <a:lstStyle/>
+          <a:p>
+            <a:pPr algn="l">
+              <a:lnSpc>
+                <a:spcPct val="105000"/>
+              </a:lnSpc>
+              <a:spcAft>
+                <a:spcPts val="400"/>
+              </a:spcAft>
+            </a:pPr>
+            <a:r>
+              <a:rPr sz="1100" b="1" i="0">
+                <a:solidFill>
+                  <a:srgbClr val="6E1F2E"/>
+                </a:solidFill>
+                <a:latin typeface="Calibri"/>
+              </a:rPr>
+              <a:t>20,000 TRIALS ON COST, SCOPE AND SCHEDULE</a:t>
+            </a:r>
+          </a:p>
+        </p:txBody>
+      </p:sp>
+      <p:sp>
+        <p:nvSpPr>
+          <p:cNvPr id="4" name="TextBox 3"/>
+          <p:cNvSpPr txBox="1"/>
+          <p:nvPr/>
+        </p:nvSpPr>
+        <p:spPr>
+          <a:xfrm>
+            <a:off x="548640" y="475488"/>
+            <a:ext cx="11064240" cy="868680"/>
+          </a:xfrm>
+          <a:prstGeom prst="rect">
+            <a:avLst/>
+          </a:prstGeom>
+          <a:noFill/>
+        </p:spPr>
+        <p:txBody>
+          <a:bodyPr wrap="square" lIns="45720" rIns="45720" tIns="27432" bIns="27432" anchor="t">
+            <a:spAutoFit/>
+          </a:bodyPr>
+          <a:lstStyle/>
+          <a:p>
+            <a:pPr algn="l">
+              <a:lnSpc>
+                <a:spcPct val="100000"/>
+              </a:lnSpc>
+              <a:spcAft>
+                <a:spcPts val="400"/>
+              </a:spcAft>
+            </a:pPr>
+            <a:r>
+              <a:rPr sz="2300" b="1" i="0">
+                <a:solidFill>
+                  <a:srgbClr val="001E60"/>
+                </a:solidFill>
+                <a:latin typeface="Georgia"/>
+              </a:rPr>
+              <a:t>What the plan is worth: $10.1M at the median if the levers are worked at their odds, $16.8M if every one lands</a:t>
+            </a:r>
+          </a:p>
+        </p:txBody>
+      </p:sp>
+      <p:sp>
+        <p:nvSpPr>
+          <p:cNvPr id="5" name="TextBox 4"/>
+          <p:cNvSpPr txBox="1"/>
+          <p:nvPr/>
+        </p:nvSpPr>
+        <p:spPr>
+          <a:xfrm>
+            <a:off x="548640" y="6419088"/>
+            <a:ext cx="8229600" cy="274320"/>
+          </a:xfrm>
+          <a:prstGeom prst="rect">
+            <a:avLst/>
+          </a:prstGeom>
+          <a:noFill/>
+        </p:spPr>
+        <p:txBody>
+          <a:bodyPr wrap="square" lIns="45720" rIns="45720" tIns="27432" bIns="27432" anchor="t">
+            <a:spAutoFit/>
+          </a:bodyPr>
+          <a:lstStyle/>
+          <a:p>
+            <a:pPr algn="l">
+              <a:lnSpc>
+                <a:spcPct val="105000"/>
+              </a:lnSpc>
+              <a:spcAft>
+                <a:spcPts val="400"/>
+              </a:spcAft>
+            </a:pPr>
+            <a:r>
+              <a:rPr sz="1000" b="0" i="0">
+                <a:solidFill>
+                  <a:srgbClr val="6B7280"/>
+                </a:solidFill>
+                <a:latin typeface="Calibri"/>
+              </a:rPr>
+              <a:t>EstimatingCoE | Eversource Energy | Stewards of Affordability</a:t>
+            </a:r>
+          </a:p>
+        </p:txBody>
+      </p:sp>
+      <p:sp>
+        <p:nvSpPr>
+          <p:cNvPr id="6" name="TextBox 5"/>
+          <p:cNvSpPr txBox="1"/>
+          <p:nvPr/>
+        </p:nvSpPr>
+        <p:spPr>
+          <a:xfrm>
+            <a:off x="10972800" y="6419088"/>
+            <a:ext cx="685800" cy="274320"/>
+          </a:xfrm>
+          <a:prstGeom prst="rect">
+            <a:avLst/>
+          </a:prstGeom>
+          <a:noFill/>
+        </p:spPr>
+        <p:txBody>
+          <a:bodyPr wrap="square" lIns="45720" rIns="45720" tIns="27432" bIns="27432" anchor="t">
+            <a:spAutoFit/>
+          </a:bodyPr>
+          <a:lstStyle/>
+          <a:p>
+            <a:pPr algn="r">
+              <a:lnSpc>
+                <a:spcPct val="105000"/>
+              </a:lnSpc>
+              <a:spcAft>
+                <a:spcPts val="400"/>
+              </a:spcAft>
+            </a:pPr>
+            <a:r>
+              <a:rPr sz="1000" b="0" i="0">
+                <a:solidFill>
+                  <a:srgbClr val="6B7280"/>
+                </a:solidFill>
+                <a:latin typeface="Calibri"/>
+              </a:rPr>
+              <a:t>12</a:t>
             </a:r>
           </a:p>
         </p:txBody>
@@ -6350,7 +6883,7 @@
                           </a:solidFill>
                           <a:latin typeface="Calibri"/>
                         </a:rPr>
-                        <a:t>$60.7M</a:t>
+                        <a:t>$60.6M</a:t>
                       </a:r>
                     </a:p>
                   </a:txBody>
@@ -6373,7 +6906,7 @@
                           </a:solidFill>
                           <a:latin typeface="Calibri"/>
                         </a:rPr>
-                        <a:t>$64.7M</a:t>
+                        <a:t>$64.5M</a:t>
                       </a:r>
                     </a:p>
                   </a:txBody>
@@ -6396,7 +6929,7 @@
                           </a:solidFill>
                           <a:latin typeface="Calibri"/>
                         </a:rPr>
-                        <a:t>71%</a:t>
+                        <a:t>70%</a:t>
                       </a:r>
                     </a:p>
                   </a:txBody>
@@ -6443,7 +6976,7 @@
                           </a:solidFill>
                           <a:latin typeface="Calibri"/>
                         </a:rPr>
-                        <a:t>$54.3M</a:t>
+                        <a:t>$50.5M</a:t>
                       </a:r>
                     </a:p>
                   </a:txBody>
@@ -6466,7 +6999,7 @@
                           </a:solidFill>
                           <a:latin typeface="Calibri"/>
                         </a:rPr>
-                        <a:t>$58.6M</a:t>
+                        <a:t>$55.8M</a:t>
                       </a:r>
                     </a:p>
                   </a:txBody>
@@ -6489,7 +7022,7 @@
                           </a:solidFill>
                           <a:latin typeface="Calibri"/>
                         </a:rPr>
-                        <a:t>29%</a:t>
+                        <a:t>14%</a:t>
                       </a:r>
                     </a:p>
                   </a:txBody>
@@ -6536,7 +7069,7 @@
                           </a:solidFill>
                           <a:latin typeface="Calibri"/>
                         </a:rPr>
-                        <a:t>$48.9M</a:t>
+                        <a:t>$43.8M</a:t>
                       </a:r>
                     </a:p>
                   </a:txBody>
@@ -6559,7 +7092,7 @@
                           </a:solidFill>
                           <a:latin typeface="Calibri"/>
                         </a:rPr>
-                        <a:t>$52.9M</a:t>
+                        <a:t>$47.7M</a:t>
                       </a:r>
                     </a:p>
                   </a:txBody>
@@ -6582,7 +7115,7 @@
                           </a:solidFill>
                           <a:latin typeface="Calibri"/>
                         </a:rPr>
-                        <a:t>4%</a:t>
+                        <a:t>0%</a:t>
                       </a:r>
                     </a:p>
                   </a:txBody>
@@ -6652,7 +7185,7 @@
                 </a:solidFill>
                 <a:latin typeface="Calibri"/>
               </a:rPr>
-              <a:t>with nothing pursued, 71% of trials end above the approval level, because the Haugland gap, the unpriced exposures and the schedule are real and the estimate carries none of them.</a:t>
+              <a:t>with nothing pursued, 70% of trials end above the approval level, because the Haugland gap, the unpriced exposures and the schedule are real and the estimate carries none of them.</a:t>
             </a:r>
           </a:p>
           <a:p>
@@ -6689,7 +7222,7 @@
                 </a:solidFill>
                 <a:latin typeface="Calibri"/>
               </a:rPr>
-              <a:t>the median lands at $54.3M and 24% of trials come in under $50M.</a:t>
+              <a:t>the median lands at $50.5M and 47% of trials come in under $50M.</a:t>
             </a:r>
           </a:p>
           <a:p>
@@ -6739,7 +7272,7 @@
 </p:sld>
 </file>
 
-<file path=ppt/slides/slide12.xml><?xml version="1.0" encoding="utf-8"?>
+<file path=ppt/slides/slide13.xml><?xml version="1.0" encoding="utf-8"?>
 <p:sld xmlns:a="http://schemas.openxmlformats.org/drawingml/2006/main" xmlns:p="http://schemas.openxmlformats.org/presentationml/2006/main" xmlns:r="http://schemas.openxmlformats.org/officeDocument/2006/relationships">
   <p:cSld>
     <p:spTree>
@@ -6916,7 +7449,7 @@
                 </a:solidFill>
                 <a:latin typeface="Georgia"/>
               </a:rPr>
-              <a:t>$57M becomes $42.4 to 47.3M through sixteen named levers, three gates and one target. Six of them need only a yes.</a:t>
+              <a:t>$57M becomes $38.5 to 42.9M through sixteen named levers, three gates and one target. Six of them need only a yes.</a:t>
             </a:r>
           </a:p>
         </p:txBody>
@@ -7048,7 +7581,7 @@
                 </a:solidFill>
                 <a:latin typeface="Calibri"/>
               </a:rPr>
-              <a:t>2. Fund and schedule the four studies now </a:t>
+              <a:t>2. Fund the four closers now </a:t>
             </a:r>
             <a:r>
               <a:rPr sz="1500">
@@ -7057,7 +7590,7 @@
                 </a:solidFill>
                 <a:latin typeface="Calibri"/>
               </a:rPr>
-              <a:t>(geotech, hosting capacity, two EMA relay actuals, the Haugland scope map) so the eight study-gated levers ($5.4 to 8.3M) are decided before IFC.</a:t>
+              <a:t>(geotech, hosting capacity at 5 MW per feeder, the Station 496 protection-basis memo, the Haugland scope map) so the eight study-gated levers ($10.6 to 13.1M), led by Engineering's Station 496 and two-feeder proposal, are decided before IFC.</a:t>
             </a:r>
           </a:p>
           <a:p>
@@ -7289,7 +7822,7 @@
                 </a:solidFill>
                 <a:latin typeface="Calibri"/>
               </a:rPr>
-              <a:t>12</a:t>
+              <a:t>13</a:t>
             </a:r>
           </a:p>
         </p:txBody>
@@ -7302,7 +7835,7 @@
 </p:sld>
 </file>
 
-<file path=ppt/slides/slide13.xml><?xml version="1.0" encoding="utf-8"?>
+<file path=ppt/slides/slide14.xml><?xml version="1.0" encoding="utf-8"?>
 <p:sld xmlns:a="http://schemas.openxmlformats.org/drawingml/2006/main" xmlns:p="http://schemas.openxmlformats.org/presentationml/2006/main" xmlns:r="http://schemas.openxmlformats.org/officeDocument/2006/relationships">
   <p:cSld>
     <p:spTree>
@@ -7393,7 +7926,7 @@
                 </a:solidFill>
                 <a:latin typeface="Calibri"/>
               </a:rPr>
-              <a:t>APPENDIX: SAVINGS REGISTER, $10.0 TO 14.6M ON THE ESTIMATE, $11.6 TO 17.2M ON THE REVENUE REQUIREMENT</a:t>
+              <a:t>APPENDIX: SAVINGS REGISTER, $15.1 TO 19.5M ON THE ESTIMATE, $11.6 TO 17.2M ON THE REVENUE REQUIREMENT</a:t>
             </a:r>
           </a:p>
         </p:txBody>
@@ -7519,7 +8052,7 @@
                 </a:solidFill>
                 <a:latin typeface="Calibri"/>
               </a:rPr>
-              <a:t>13</a:t>
+              <a:t>14</a:t>
             </a:r>
           </a:p>
         </p:txBody>
@@ -8534,7 +9067,7 @@
                           </a:solidFill>
                           <a:latin typeface="Calibri"/>
                         </a:rPr>
-                        <a:t>Station 496 relay program: 710 man-hours per relay</a:t>
+                        <a:t>Station 496: relay program out; RTU, RTAC and transfer trip only (Engineering, 5 Oct 2026)</a:t>
                       </a:r>
                     </a:p>
                   </a:txBody>
@@ -8579,7 +9112,7 @@
                           </a:solidFill>
                           <a:latin typeface="Calibri"/>
                         </a:rPr>
-                        <a:t>$1.1 to 1.5M</a:t>
+                        <a:t>$6.1 to 6.6M</a:t>
                       </a:r>
                     </a:p>
                   </a:txBody>
@@ -8602,7 +9135,7 @@
                           </a:solidFill>
                           <a:latin typeface="Calibri"/>
                         </a:rPr>
-                        <a:t>$1.1 to 1.5M</a:t>
+                        <a:t>$6.1 to 6.6M</a:t>
                       </a:r>
                     </a:p>
                   </a:txBody>
@@ -8646,7 +9179,7 @@
                           </a:solidFill>
                           <a:latin typeface="Calibri"/>
                         </a:rPr>
-                        <a:t>P&amp;C Engineering + EMA</a:t>
+                        <a:t>P&amp;C Engineering + System Protection</a:t>
                       </a:r>
                     </a:p>
                   </a:txBody>
@@ -8692,7 +9225,7 @@
                           </a:solidFill>
                           <a:latin typeface="Calibri"/>
                         </a:rPr>
-                        <a:t>Interconnection topology: five feeder cabinets, four GSUs, four breakers, four metering sets for 10 MW</a:t>
+                        <a:t>Two feeders instead of four: two skids, two metering sets, two duct-bank runs (Engineering, 5 Oct 2026)</a:t>
                       </a:r>
                     </a:p>
                   </a:txBody>
@@ -8737,7 +9270,7 @@
                           </a:solidFill>
                           <a:latin typeface="Calibri"/>
                         </a:rPr>
-                        <a:t>$0.9 to 1.4M</a:t>
+                        <a:t>$1.0 to 1.2M</a:t>
                       </a:r>
                     </a:p>
                   </a:txBody>
@@ -8760,7 +9293,7 @@
                           </a:solidFill>
                           <a:latin typeface="Calibri"/>
                         </a:rPr>
-                        <a:t>$1.4 to 1.9M</a:t>
+                        <a:t>$1.5 to 1.7M</a:t>
                       </a:r>
                     </a:p>
                   </a:txBody>
@@ -8782,7 +9315,7 @@
                           </a:solidFill>
                           <a:latin typeface="Calibri"/>
                         </a:rPr>
-                        <a:t>Low</a:t>
+                        <a:t>Medium</a:t>
                       </a:r>
                     </a:p>
                   </a:txBody>
@@ -10424,7 +10957,7 @@
                 </a:solidFill>
                 <a:latin typeface="Georgia"/>
               </a:rPr>
-              <a:t>The number can be driven from $57.2M to $42.4 to 47.3M. About a third of that needs only a decision.</a:t>
+              <a:t>The number can be driven from $57.2M to $38.5 to 42.9M. About a third of that needs only a decision.</a:t>
             </a:r>
           </a:p>
         </p:txBody>
@@ -10934,7 +11467,7 @@
                 </a:solidFill>
                 <a:latin typeface="Georgia"/>
               </a:rPr>
-              <a:t>$42.4 to 47.3M</a:t>
+              <a:t>$38.5 to 42.9M</a:t>
             </a:r>
           </a:p>
         </p:txBody>
@@ -11018,7 +11551,7 @@
                 </a:solidFill>
                 <a:latin typeface="Calibri"/>
               </a:rPr>
-              <a:t>Geotech, hosting capacity, relay actuals, Haugland scope map; Q1 2027</a:t>
+              <a:t>Geotech, hosting capacity, the Station 496 protection basis, the Haugland scope map; Q1 2027</a:t>
             </a:r>
           </a:p>
         </p:txBody>
@@ -11115,7 +11648,7 @@
                 </a:solidFill>
                 <a:latin typeface="Calibri"/>
               </a:rPr>
-              <a:t>$5.4 to 8.3M loaded. Two feeders instead of four, the relay program at benchmark, civil sized after geotech, a crew build-up for install.</a:t>
+              <a:t>$10.6 to 13.1M loaded. Engineering's proposal (Station 496 to RTU, RTAC and transfer trip only; two feeders instead of four), civil sized after geotech, a crew build-up for install.</a:t>
             </a:r>
           </a:p>
           <a:p>
@@ -11594,7 +12127,7 @@
                           </a:solidFill>
                           <a:latin typeface="Calibri"/>
                         </a:rPr>
-                        <a:t>$5.4 to 8.3M</a:t>
+                        <a:t>$10.6 to 13.1M</a:t>
                       </a:r>
                     </a:p>
                   </a:txBody>
@@ -11641,7 +12174,7 @@
                           </a:solidFill>
                           <a:latin typeface="Calibri"/>
                         </a:rPr>
-                        <a:t>$10.3 to 15.3M</a:t>
+                        <a:t>$15.4 to 20.1M</a:t>
                       </a:r>
                     </a:p>
                   </a:txBody>
@@ -11688,7 +12221,7 @@
                           </a:solidFill>
                           <a:latin typeface="Calibri"/>
                         </a:rPr>
-                        <a:t>-$1.7 to 3.2M</a:t>
+                        <a:t>-$2.0 to 3.9M</a:t>
                       </a:r>
                     </a:p>
                   </a:txBody>
@@ -13565,7 +14098,7 @@
                 </a:solidFill>
                 <a:latin typeface="Georgia"/>
               </a:rPr>
-              <a:t>Decide at Gate 1 (Q1 2027): eight levers worth $5.4 to 8.3M, each closed by a study already on the critical path</a:t>
+              <a:t>Decide at Gate 1 (Q1 2027): eight levers worth $10.6 to 13.1M, each closed by a study already on the critical path</a:t>
             </a:r>
           </a:p>
         </p:txBody>
@@ -13664,7 +14197,7 @@
         </p:nvGraphicFramePr>
         <p:xfrm>
           <a:off x="548640" y="1371600"/>
-          <a:ext cx="11064239" cy="4480560"/>
+          <a:ext cx="11064240" cy="4480560"/>
         </p:xfrm>
         <a:graphic>
           <a:graphicData uri="http://schemas.openxmlformats.org/drawingml/2006/table">
@@ -13674,8 +14207,8 @@
               </a:tblPr>
               <a:tblGrid>
                 <a:gridCol w="411480"/>
-                <a:gridCol w="3749039"/>
-                <a:gridCol w="1188720"/>
+                <a:gridCol w="3566160"/>
+                <a:gridCol w="1371600"/>
                 <a:gridCol w="640080"/>
                 <a:gridCol w="2377440"/>
                 <a:gridCol w="1920240"/>
@@ -14032,7 +14565,7 @@
                           </a:solidFill>
                           <a:latin typeface="Calibri"/>
                         </a:rPr>
-                        <a:t>Price the Station 496 relay program at benchmark</a:t>
+                        <a:t>Station 496: relay program out; RTU, RTAC and transfer trip only</a:t>
                       </a:r>
                     </a:p>
                   </a:txBody>
@@ -14055,7 +14588,7 @@
                           </a:solidFill>
                           <a:latin typeface="Calibri"/>
                         </a:rPr>
-                        <a:t>$1.1 to 1.5M</a:t>
+                        <a:t>$6.1 to 6.6M</a:t>
                       </a:r>
                     </a:p>
                   </a:txBody>
@@ -14078,7 +14611,7 @@
                           </a:solidFill>
                           <a:latin typeface="Calibri"/>
                         </a:rPr>
-                        <a:t>50%</a:t>
+                        <a:t>60%</a:t>
                       </a:r>
                     </a:p>
                   </a:txBody>
@@ -14100,7 +14633,7 @@
                           </a:solidFill>
                           <a:latin typeface="Calibri"/>
                         </a:rPr>
-                        <a:t>Two recent EMA relay actuals</a:t>
+                        <a:t>Protection-basis memo; RTU/RTAC scope priced</a:t>
                       </a:r>
                     </a:p>
                   </a:txBody>
@@ -14122,7 +14655,7 @@
                           </a:solidFill>
                           <a:latin typeface="Calibri"/>
                         </a:rPr>
-                        <a:t>P&amp;C Engineering + EMA</a:t>
+                        <a:t>P&amp;C Engineering + System Protection</a:t>
                       </a:r>
                     </a:p>
                   </a:txBody>
@@ -14144,7 +14677,7 @@
                           </a:solidFill>
                           <a:latin typeface="Calibri"/>
                         </a:rPr>
-                        <a:t>Q1 2027</a:t>
+                        <a:t>Dec 2026</a:t>
                       </a:r>
                     </a:p>
                   </a:txBody>
@@ -14190,7 +14723,7 @@
                           </a:solidFill>
                           <a:latin typeface="Calibri"/>
                         </a:rPr>
-                        <a:t>Two feeders instead of four if hosting capacity allows</a:t>
+                        <a:t>Two feeders instead of four: two skids, two metering sets, two duct-bank runs</a:t>
                       </a:r>
                     </a:p>
                   </a:txBody>
@@ -14213,7 +14746,7 @@
                           </a:solidFill>
                           <a:latin typeface="Calibri"/>
                         </a:rPr>
-                        <a:t>$1.4 to 1.9M</a:t>
+                        <a:t>$1.5 to 1.7M</a:t>
                       </a:r>
                     </a:p>
                   </a:txBody>
@@ -14236,7 +14769,7 @@
                           </a:solidFill>
                           <a:latin typeface="Calibri"/>
                         </a:rPr>
-                        <a:t>35%</a:t>
+                        <a:t>60%</a:t>
                       </a:r>
                     </a:p>
                   </a:txBody>
@@ -14258,7 +14791,7 @@
                           </a:solidFill>
                           <a:latin typeface="Calibri"/>
                         </a:rPr>
-                        <a:t>Hosting-capacity study</a:t>
+                        <a:t>Hosting-capacity study at 5 MW per feeder; N-1 accepted</a:t>
                       </a:r>
                     </a:p>
                   </a:txBody>
@@ -15161,7 +15694,7 @@
                           </a:solidFill>
                           <a:latin typeface="Calibri"/>
                         </a:rPr>
-                        <a:t>$5.4 to 8.3M</a:t>
+                        <a:t>$10.6 to 13.1M</a:t>
                       </a:r>
                     </a:p>
                   </a:txBody>
@@ -15320,7 +15853,7 @@
                 </a:solidFill>
                 <a:latin typeface="Calibri"/>
               </a:rPr>
-              <a:t>fund and schedule the four studies now (geotech, hosting capacity, two EMA relay actuals, the Haugland scope map) so every one of these is decided before IFC, not discovered after.</a:t>
+              <a:t>fund and schedule the four closers now (geotech, hosting capacity at 5 MW per feeder, the Station 496 protection-basis memo, the Haugland scope map) so every one of these is decided before IFC, not discovered after.</a:t>
             </a:r>
           </a:p>
         </p:txBody>
@@ -15424,7 +15957,7 @@
                 </a:solidFill>
                 <a:latin typeface="Calibri"/>
               </a:rPr>
-              <a:t>GROUP 3: REVENUE REQUIREMENT</a:t>
+              <a:t>GROUP 2, THE TWO LARGEST LEVERS, ON ONE MEMO AND ONE STUDY</a:t>
             </a:r>
           </a:p>
         </p:txBody>
@@ -15466,7 +15999,7 @@
                 </a:solidFill>
                 <a:latin typeface="Georgia"/>
               </a:rPr>
-              <a:t>The largest lever is not in the estimate: $8.4 to 12.4M of Section 48E credit to customers, and nobody owns it yet</a:t>
+              <a:t>Engineering's 5 Oct proposal is worth $7.6 to 8.3M: Station 496 to RTU, RTAC and transfer trip only, and two feeders</a:t>
             </a:r>
           </a:p>
         </p:txBody>
@@ -15636,7 +16169,7 @@
                 </a:solidFill>
                 <a:latin typeface="Georgia"/>
               </a:rPr>
-              <a:t>$8.4 to 12.4M</a:t>
+              <a:t>$6.1 to 6.6M</a:t>
             </a:r>
           </a:p>
         </p:txBody>
@@ -15678,7 +16211,7 @@
                 </a:solidFill>
                 <a:latin typeface="Calibri"/>
               </a:rPr>
-              <a:t>30% credit, eligible basis</a:t>
+              <a:t>Station 496, net</a:t>
             </a:r>
           </a:p>
         </p:txBody>
@@ -15720,7 +16253,7 @@
                 </a:solidFill>
                 <a:latin typeface="Calibri"/>
               </a:rPr>
-              <a:t>Battery, install, balance of plant ($28M); up to $41M with station, site and testing</a:t>
+              <a:t>$7.25M relay program out; $0.7 to 1.1M kept for the RTU, RTAC and transfer trip, which Rev 2 names but does not price</a:t>
             </a:r>
           </a:p>
         </p:txBody>
@@ -15806,7 +16339,7 @@
                 </a:solidFill>
                 <a:latin typeface="Georgia"/>
               </a:rPr>
-              <a:t>+$2.8 to 4.1M</a:t>
+              <a:t>$1.5 to 1.7M</a:t>
             </a:r>
           </a:p>
         </p:txBody>
@@ -15848,7 +16381,7 @@
                 </a:solidFill>
                 <a:latin typeface="Calibri"/>
               </a:rPr>
-              <a:t>Energy-community adder</a:t>
+              <a:t>Two feeders, loaded</a:t>
             </a:r>
           </a:p>
         </p:txBody>
@@ -15890,7 +16423,7 @@
                 </a:solidFill>
                 <a:latin typeface="Calibri"/>
               </a:rPr>
-              <a:t>Only if the closed landfill qualifies as a brownfield; not assumed</a:t>
+              <a:t>Two breaker skids, two metering sets, two duct-bank runs, two riser-pole pairs; four GSUs unchanged</a:t>
             </a:r>
           </a:p>
         </p:txBody>
@@ -15976,7 +16509,7 @@
                 </a:solidFill>
                 <a:latin typeface="Georgia"/>
               </a:rPr>
-              <a:t>65%</a:t>
+              <a:t>$42.4 to 45.0M</a:t>
             </a:r>
           </a:p>
         </p:txBody>
@@ -16018,7 +16551,7 @@
                 </a:solidFill>
                 <a:latin typeface="Calibri"/>
               </a:rPr>
-              <a:t>Non-PFE cost ratio</a:t>
+              <a:t>Contained case plus this</a:t>
             </a:r>
           </a:p>
         </p:txBody>
@@ -16060,7 +16593,7 @@
                 </a:solidFill>
                 <a:latin typeface="Calibri"/>
               </a:rPr>
-              <a:t>Cell origin on the Voyager units decides whether the credit is zero</a:t>
+              <a:t>The six no-study decisions and the proposal; nothing else in the register</a:t>
             </a:r>
           </a:p>
         </p:txBody>
@@ -16074,8 +16607,8 @@
           <p:nvPr/>
         </p:nvGraphicFramePr>
         <p:xfrm>
-          <a:off x="548640" y="3383280"/>
-          <a:ext cx="11064240" cy="2286000"/>
+          <a:off x="548640" y="3291840"/>
+          <a:ext cx="11064240" cy="2468880"/>
         </p:xfrm>
         <a:graphic>
           <a:graphicData uri="http://schemas.openxmlformats.org/drawingml/2006/table">
@@ -16084,25 +16617,25 @@
                 <a:tableStyleId>{5C22544A-7EE6-4342-B048-85BDC9FD1C3A}</a:tableStyleId>
               </a:tblPr>
               <a:tblGrid>
-                <a:gridCol w="4754880"/>
-                <a:gridCol w="2194560"/>
-                <a:gridCol w="1371600"/>
-                <a:gridCol w="2743200"/>
+                <a:gridCol w="5486400"/>
+                <a:gridCol w="2011680"/>
+                <a:gridCol w="914400"/>
+                <a:gridCol w="2651760"/>
               </a:tblGrid>
-              <a:tr h="457200">
-                <a:tc>
-                  <a:txBody>
-                    <a:bodyPr/>
-                    <a:lstStyle/>
-                    <a:p>
-                      <a:r>
-                        <a:rPr sz="1200" b="1">
+              <a:tr h="411480">
+                <a:tc>
+                  <a:txBody>
+                    <a:bodyPr/>
+                    <a:lstStyle/>
+                    <a:p>
+                      <a:r>
+                        <a:rPr sz="1000" b="1">
                           <a:solidFill>
                             <a:srgbClr val="FFFFFF"/>
                           </a:solidFill>
                           <a:latin typeface="Calibri"/>
                         </a:rPr>
-                        <a:t>Decision</a:t>
+                        <a:t>What makes it real</a:t>
                       </a:r>
                     </a:p>
                   </a:txBody>
@@ -16118,7 +16651,7 @@
                     <a:lstStyle/>
                     <a:p>
                       <a:r>
-                        <a:rPr sz="1200" b="1">
+                        <a:rPr sz="1000" b="1">
                           <a:solidFill>
                             <a:srgbClr val="FFFFFF"/>
                           </a:solidFill>
@@ -16140,7 +16673,7 @@
                     <a:lstStyle/>
                     <a:p>
                       <a:r>
-                        <a:rPr sz="1200" b="1">
+                        <a:rPr sz="1000" b="1">
                           <a:solidFill>
                             <a:srgbClr val="FFFFFF"/>
                           </a:solidFill>
@@ -16162,13 +16695,13 @@
                     <a:lstStyle/>
                     <a:p>
                       <a:r>
-                        <a:rPr sz="1200" b="1">
+                        <a:rPr sz="1000" b="1">
                           <a:solidFill>
                             <a:srgbClr val="FFFFFF"/>
                           </a:solidFill>
                           <a:latin typeface="Calibri"/>
                         </a:rPr>
-                        <a:t>Why it matters</a:t>
+                        <a:t>What it decides</a:t>
                       </a:r>
                     </a:p>
                   </a:txBody>
@@ -16179,20 +16712,20 @@
                   </a:tcPr>
                 </a:tc>
               </a:tr>
-              <a:tr h="457200">
-                <a:tc>
-                  <a:txBody>
-                    <a:bodyPr/>
-                    <a:lstStyle/>
-                    <a:p>
-                      <a:r>
-                        <a:rPr sz="1200" b="0">
-                          <a:solidFill>
-                            <a:srgbClr val="1F2A44"/>
-                          </a:solidFill>
-                          <a:latin typeface="Calibri"/>
-                        </a:rPr>
-                        <a:t>Eligible-basis opinion: which layers are energy storage property</a:t>
+              <a:tr h="411480">
+                <a:tc>
+                  <a:txBody>
+                    <a:bodyPr/>
+                    <a:lstStyle/>
+                    <a:p>
+                      <a:r>
+                        <a:rPr sz="1000" b="0">
+                          <a:solidFill>
+                            <a:srgbClr val="1F2A44"/>
+                          </a:solidFill>
+                          <a:latin typeface="Calibri"/>
+                        </a:rPr>
+                        <a:t>Protection-basis memo: the existing SEL-551 and REF610 relays plus an RTAC transfer trip over the dark fiber meet the interconnection requirement</a:t>
                       </a:r>
                     </a:p>
                   </a:txBody>
@@ -16208,13 +16741,13 @@
                     <a:lstStyle/>
                     <a:p>
                       <a:r>
-                        <a:rPr sz="1200" b="0">
-                          <a:solidFill>
-                            <a:srgbClr val="1F2A44"/>
-                          </a:solidFill>
-                          <a:latin typeface="Calibri"/>
-                        </a:rPr>
-                        <a:t>Tax</a:t>
+                        <a:rPr sz="1000" b="0">
+                          <a:solidFill>
+                            <a:srgbClr val="1F2A44"/>
+                          </a:solidFill>
+                          <a:latin typeface="Calibri"/>
+                        </a:rPr>
+                        <a:t>System Protection</a:t>
                       </a:r>
                     </a:p>
                   </a:txBody>
@@ -16230,7 +16763,7 @@
                     <a:lstStyle/>
                     <a:p>
                       <a:r>
-                        <a:rPr sz="1200" b="0">
+                        <a:rPr sz="1000" b="0">
                           <a:solidFill>
                             <a:srgbClr val="1F2A44"/>
                           </a:solidFill>
@@ -16252,13 +16785,13 @@
                     <a:lstStyle/>
                     <a:p>
                       <a:r>
-                        <a:rPr sz="1200" b="0">
-                          <a:solidFill>
-                            <a:srgbClr val="1F2A44"/>
-                          </a:solidFill>
-                          <a:latin typeface="Calibri"/>
-                        </a:rPr>
-                        <a:t>Sets the $28M to $41M range</a:t>
+                        <a:rPr sz="1000" b="0">
+                          <a:solidFill>
+                            <a:srgbClr val="1F2A44"/>
+                          </a:solidFill>
+                          <a:latin typeface="Calibri"/>
+                        </a:rPr>
+                        <a:t>Without it the $7.25M stays</a:t>
                       </a:r>
                     </a:p>
                   </a:txBody>
@@ -16269,20 +16802,20 @@
                   </a:tcPr>
                 </a:tc>
               </a:tr>
-              <a:tr h="457200">
-                <a:tc>
-                  <a:txBody>
-                    <a:bodyPr/>
-                    <a:lstStyle/>
-                    <a:p>
-                      <a:r>
-                        <a:rPr sz="1200" b="0">
-                          <a:solidFill>
-                            <a:srgbClr val="1F2A44"/>
-                          </a:solidFill>
-                          <a:latin typeface="Calibri"/>
-                        </a:rPr>
-                        <a:t>FEOC cost-ratio test on the Nomad cells (Notice 2026-15)</a:t>
+              <a:tr h="411480">
+                <a:tc>
+                  <a:txBody>
+                    <a:bodyPr/>
+                    <a:lstStyle/>
+                    <a:p>
+                      <a:r>
+                        <a:rPr sz="1000" b="0">
+                          <a:solidFill>
+                            <a:srgbClr val="1F2A44"/>
+                          </a:solidFill>
+                          <a:latin typeface="Calibri"/>
+                        </a:rPr>
+                        <a:t>Price the RTU, RTAC/Axion, panel, fiber terminations and point lists (named in Rev 2, no line)</a:t>
                       </a:r>
                     </a:p>
                   </a:txBody>
@@ -16298,13 +16831,13 @@
                     <a:lstStyle/>
                     <a:p>
                       <a:r>
-                        <a:rPr sz="1200" b="0">
-                          <a:solidFill>
-                            <a:srgbClr val="1F2A44"/>
-                          </a:solidFill>
-                          <a:latin typeface="Calibri"/>
-                        </a:rPr>
-                        <a:t>Tax + Sourcing + Nomad</a:t>
+                        <a:rPr sz="1000" b="0">
+                          <a:solidFill>
+                            <a:srgbClr val="1F2A44"/>
+                          </a:solidFill>
+                          <a:latin typeface="Calibri"/>
+                        </a:rPr>
+                        <a:t>P&amp;C Eng. + Cost Estimating</a:t>
                       </a:r>
                     </a:p>
                   </a:txBody>
@@ -16320,13 +16853,13 @@
                     <a:lstStyle/>
                     <a:p>
                       <a:r>
-                        <a:rPr sz="1200" b="0">
-                          <a:solidFill>
-                            <a:srgbClr val="1F2A44"/>
-                          </a:solidFill>
-                          <a:latin typeface="Calibri"/>
-                        </a:rPr>
-                        <a:t>Before final drawings</a:t>
+                        <a:rPr sz="1000" b="0">
+                          <a:solidFill>
+                            <a:srgbClr val="1F2A44"/>
+                          </a:solidFill>
+                          <a:latin typeface="Calibri"/>
+                        </a:rPr>
+                        <a:t>Nov 2026</a:t>
                       </a:r>
                     </a:p>
                   </a:txBody>
@@ -16342,13 +16875,13 @@
                     <a:lstStyle/>
                     <a:p>
                       <a:r>
-                        <a:rPr sz="1200" b="0">
-                          <a:solidFill>
-                            <a:srgbClr val="1F2A44"/>
-                          </a:solidFill>
-                          <a:latin typeface="Calibri"/>
-                        </a:rPr>
-                        <a:t>A failed test is a zero credit</a:t>
+                        <a:rPr sz="1000" b="0">
+                          <a:solidFill>
+                            <a:srgbClr val="1F2A44"/>
+                          </a:solidFill>
+                          <a:latin typeface="Calibri"/>
+                        </a:rPr>
+                        <a:t>Allowance of $0.30 to 0.55M direct until then</a:t>
                       </a:r>
                     </a:p>
                   </a:txBody>
@@ -16359,20 +16892,20 @@
                   </a:tcPr>
                 </a:tc>
               </a:tr>
-              <a:tr h="457200">
-                <a:tc>
-                  <a:txBody>
-                    <a:bodyPr/>
-                    <a:lstStyle/>
-                    <a:p>
-                      <a:r>
-                        <a:rPr sz="1200" b="0">
-                          <a:solidFill>
-                            <a:srgbClr val="1F2A44"/>
-                          </a:solidFill>
-                          <a:latin typeface="Calibri"/>
-                        </a:rPr>
-                        <a:t>Normalization election; DPU treatment of the credit</a:t>
+              <a:tr h="411480">
+                <a:tc>
+                  <a:txBody>
+                    <a:bodyPr/>
+                    <a:lstStyle/>
+                    <a:p>
+                      <a:r>
+                        <a:rPr sz="1000" b="0">
+                          <a:solidFill>
+                            <a:srgbClr val="1F2A44"/>
+                          </a:solidFill>
+                          <a:latin typeface="Calibri"/>
+                        </a:rPr>
+                        <a:t>Asset-condition check on the legacy relays</a:t>
                       </a:r>
                     </a:p>
                   </a:txBody>
@@ -16388,13 +16921,13 @@
                     <a:lstStyle/>
                     <a:p>
                       <a:r>
-                        <a:rPr sz="1200" b="0">
-                          <a:solidFill>
-                            <a:srgbClr val="1F2A44"/>
-                          </a:solidFill>
-                          <a:latin typeface="Calibri"/>
-                        </a:rPr>
-                        <a:t>Regulatory</a:t>
+                        <a:rPr sz="1000" b="0">
+                          <a:solidFill>
+                            <a:srgbClr val="1F2A44"/>
+                          </a:solidFill>
+                          <a:latin typeface="Calibri"/>
+                        </a:rPr>
+                        <a:t>Asset Management</a:t>
                       </a:r>
                     </a:p>
                   </a:txBody>
@@ -16410,13 +16943,13 @@
                     <a:lstStyle/>
                     <a:p>
                       <a:r>
-                        <a:rPr sz="1200" b="0">
-                          <a:solidFill>
-                            <a:srgbClr val="1F2A44"/>
-                          </a:solidFill>
-                          <a:latin typeface="Calibri"/>
-                        </a:rPr>
-                        <a:t>2027 filing</a:t>
+                        <a:rPr sz="1000" b="0">
+                          <a:solidFill>
+                            <a:srgbClr val="1F2A44"/>
+                          </a:solidFill>
+                          <a:latin typeface="Calibri"/>
+                        </a:rPr>
+                        <a:t>Dec 2026</a:t>
                       </a:r>
                     </a:p>
                   </a:txBody>
@@ -16432,13 +16965,13 @@
                     <a:lstStyle/>
                     <a:p>
                       <a:r>
-                        <a:rPr sz="1200" b="0">
-                          <a:solidFill>
-                            <a:srgbClr val="1F2A44"/>
-                          </a:solidFill>
-                          <a:latin typeface="Calibri"/>
-                        </a:rPr>
-                        <a:t>Decides how fast customers see it</a:t>
+                        <a:rPr sz="1000" b="0">
+                          <a:solidFill>
+                            <a:srgbClr val="1F2A44"/>
+                          </a:solidFill>
+                          <a:latin typeface="Calibri"/>
+                        </a:rPr>
+                        <a:t>If they must go anyway, the cost moves to that program; customers do not save it</a:t>
                       </a:r>
                     </a:p>
                   </a:txBody>
@@ -16449,20 +16982,20 @@
                   </a:tcPr>
                 </a:tc>
               </a:tr>
-              <a:tr h="457200">
-                <a:tc>
-                  <a:txBody>
-                    <a:bodyPr/>
-                    <a:lstStyle/>
-                    <a:p>
-                      <a:r>
-                        <a:rPr sz="1200" b="0">
-                          <a:solidFill>
-                            <a:srgbClr val="1F2A44"/>
-                          </a:solidFill>
-                          <a:latin typeface="Calibri"/>
-                        </a:rPr>
-                        <a:t>Prevailing wage and apprenticeship in the construction contracts</a:t>
+              <a:tr h="411480">
+                <a:tc>
+                  <a:txBody>
+                    <a:bodyPr/>
+                    <a:lstStyle/>
+                    <a:p>
+                      <a:r>
+                        <a:rPr sz="1000" b="0">
+                          <a:solidFill>
+                            <a:srgbClr val="1F2A44"/>
+                          </a:solidFill>
+                          <a:latin typeface="Calibri"/>
+                        </a:rPr>
+                        <a:t>Hosting-capacity and protection study at 5 MW per feeder; N-1 position accepted in writing</a:t>
                       </a:r>
                     </a:p>
                   </a:txBody>
@@ -16478,13 +17011,13 @@
                     <a:lstStyle/>
                     <a:p>
                       <a:r>
-                        <a:rPr sz="1200" b="0">
-                          <a:solidFill>
-                            <a:srgbClr val="1F2A44"/>
-                          </a:solidFill>
-                          <a:latin typeface="Calibri"/>
-                        </a:rPr>
-                        <a:t>Sourcing + Construction</a:t>
+                        <a:rPr sz="1000" b="0">
+                          <a:solidFill>
+                            <a:srgbClr val="1F2A44"/>
+                          </a:solidFill>
+                          <a:latin typeface="Calibri"/>
+                        </a:rPr>
+                        <a:t>System Planning</a:t>
                       </a:r>
                     </a:p>
                   </a:txBody>
@@ -16500,13 +17033,13 @@
                     <a:lstStyle/>
                     <a:p>
                       <a:r>
-                        <a:rPr sz="1200" b="0">
-                          <a:solidFill>
-                            <a:srgbClr val="1F2A44"/>
-                          </a:solidFill>
-                          <a:latin typeface="Calibri"/>
-                        </a:rPr>
-                        <a:t>Gate 3</a:t>
+                        <a:rPr sz="1000" b="0">
+                          <a:solidFill>
+                            <a:srgbClr val="1F2A44"/>
+                          </a:solidFill>
+                          <a:latin typeface="Calibri"/>
+                        </a:rPr>
+                        <a:t>Q1 2027</a:t>
                       </a:r>
                     </a:p>
                   </a:txBody>
@@ -16522,19 +17055,109 @@
                     <a:lstStyle/>
                     <a:p>
                       <a:r>
-                        <a:rPr sz="1200" b="0">
-                          <a:solidFill>
-                            <a:srgbClr val="1F2A44"/>
-                          </a:solidFill>
-                          <a:latin typeface="Calibri"/>
-                        </a:rPr>
-                        <a:t>6% credit becomes 30%</a:t>
+                        <a:rPr sz="1000" b="0">
+                          <a:solidFill>
+                            <a:srgbClr val="1F2A44"/>
+                          </a:solidFill>
+                          <a:latin typeface="Calibri"/>
+                        </a:rPr>
+                        <a:t>Two feeders, and whether voltage mitigation is needed ($0.2M to $0.5M exposure)</a:t>
                       </a:r>
                     </a:p>
                   </a:txBody>
                   <a:tcPr marL="54864" marR="54864" marT="27432" marB="27432" anchor="ctr">
                     <a:solidFill>
                       <a:srgbClr val="F2F4F8"/>
+                    </a:solidFill>
+                  </a:tcPr>
+                </a:tc>
+              </a:tr>
+              <a:tr h="411480">
+                <a:tc>
+                  <a:txBody>
+                    <a:bodyPr/>
+                    <a:lstStyle/>
+                    <a:p>
+                      <a:r>
+                        <a:rPr sz="1000" b="0">
+                          <a:solidFill>
+                            <a:srgbClr val="1F2A44"/>
+                          </a:solidFill>
+                          <a:latin typeface="Calibri"/>
+                        </a:rPr>
+                        <a:t>D-Line 24211 re-scoped to two tie-ins</a:t>
+                      </a:r>
+                    </a:p>
+                  </a:txBody>
+                  <a:tcPr marL="54864" marR="54864" marT="27432" marB="27432" anchor="ctr">
+                    <a:solidFill>
+                      <a:srgbClr val="FFFFFF"/>
+                    </a:solidFill>
+                  </a:tcPr>
+                </a:tc>
+                <a:tc>
+                  <a:txBody>
+                    <a:bodyPr/>
+                    <a:lstStyle/>
+                    <a:p>
+                      <a:r>
+                        <a:rPr sz="1000" b="0">
+                          <a:solidFill>
+                            <a:srgbClr val="1F2A44"/>
+                          </a:solidFill>
+                          <a:latin typeface="Calibri"/>
+                        </a:rPr>
+                        <a:t>Distribution Eng.</a:t>
+                      </a:r>
+                    </a:p>
+                  </a:txBody>
+                  <a:tcPr marL="54864" marR="54864" marT="27432" marB="27432" anchor="ctr">
+                    <a:solidFill>
+                      <a:srgbClr val="FFFFFF"/>
+                    </a:solidFill>
+                  </a:tcPr>
+                </a:tc>
+                <a:tc>
+                  <a:txBody>
+                    <a:bodyPr/>
+                    <a:lstStyle/>
+                    <a:p>
+                      <a:r>
+                        <a:rPr sz="1000" b="0">
+                          <a:solidFill>
+                            <a:srgbClr val="1F2A44"/>
+                          </a:solidFill>
+                          <a:latin typeface="Calibri"/>
+                        </a:rPr>
+                        <a:t>Q1 2027</a:t>
+                      </a:r>
+                    </a:p>
+                  </a:txBody>
+                  <a:tcPr marL="54864" marR="54864" marT="27432" marB="27432" anchor="ctr">
+                    <a:solidFill>
+                      <a:srgbClr val="FFFFFF"/>
+                    </a:solidFill>
+                  </a:tcPr>
+                </a:tc>
+                <a:tc>
+                  <a:txBody>
+                    <a:bodyPr/>
+                    <a:lstStyle/>
+                    <a:p>
+                      <a:r>
+                        <a:rPr sz="1000" b="0">
+                          <a:solidFill>
+                            <a:srgbClr val="1F2A44"/>
+                          </a:solidFill>
+                          <a:latin typeface="Calibri"/>
+                        </a:rPr>
+                        <a:t>Outside 21334; the 2023 $4.8M memo shrinks too</a:t>
+                      </a:r>
+                    </a:p>
+                  </a:txBody>
+                  <a:tcPr marL="54864" marR="54864" marT="27432" marB="27432" anchor="ctr">
+                    <a:solidFill>
+                      <a:srgbClr val="FFFFFF"/>
                     </a:solidFill>
                   </a:tcPr>
                 </a:tc>
@@ -16551,7 +17174,7 @@
         </p:nvSpPr>
         <p:spPr>
           <a:xfrm>
-            <a:off x="548640" y="5806440"/>
+            <a:off x="548640" y="5897880"/>
             <a:ext cx="11064240" cy="548640"/>
           </a:xfrm>
           <a:prstGeom prst="rect">
@@ -16574,7 +17197,7 @@
               </a:spcAft>
             </a:pPr>
             <a:r>
-              <a:rPr sz="1400">
+              <a:rPr sz="1200">
                 <a:solidFill>
                   <a:srgbClr val="FFC72C"/>
                 </a:solidFill>
@@ -16583,22 +17206,22 @@
               <a:t>▪  </a:t>
             </a:r>
             <a:r>
-              <a:rPr b="1" sz="1400">
+              <a:rPr b="1" sz="1200">
                 <a:solidFill>
                   <a:srgbClr val="1F2A44"/>
                 </a:solidFill>
                 <a:latin typeface="Calibri"/>
               </a:rPr>
-              <a:t>The ask: </a:t>
-            </a:r>
-            <a:r>
-              <a:rPr sz="1400">
+              <a:t>The honest reading: </a:t>
+            </a:r>
+            <a:r>
+              <a:rPr sz="1200">
                 <a:solidFill>
                   <a:srgbClr val="1F2A44"/>
                 </a:solidFill>
                 <a:latin typeface="Calibri"/>
               </a:rPr>
-              <a:t>open the 48E memo with Tax this month. It is larger than every estimate lever combined and it has a construction-start deadline.</a:t>
+              <a:t>the largest single lever in the register and about a quarter of the simulated variance on its own. It is a saving to customers only if the relays were BESS-driven scope; say which before it goes in the PAF.</a:t>
             </a:r>
           </a:p>
         </p:txBody>
@@ -16702,7 +17325,7 @@
                 </a:solidFill>
                 <a:latin typeface="Calibri"/>
               </a:rPr>
-              <a:t>GATE 2: DESIGN-TO-COST (BEFORE IFC, MID-2027)</a:t>
+              <a:t>GROUP 3: REVENUE REQUIREMENT</a:t>
             </a:r>
           </a:p>
         </p:txBody>
@@ -16744,7 +17367,7 @@
                 </a:solidFill>
                 <a:latin typeface="Georgia"/>
               </a:rPr>
-              <a:t>Hold it: a station-direct target of $1,250 per kWh, $50M loaded, with change control and a monthly number</a:t>
+              <a:t>The largest lever is not in the estimate: $8.4 to 12.4M of Section 48E credit to customers, and nobody owns it yet</a:t>
             </a:r>
           </a:p>
         </p:txBody>
@@ -16829,6 +17452,1284 @@
                 <a:latin typeface="Calibri"/>
               </a:rPr>
               <a:t>7</a:t>
+            </a:r>
+          </a:p>
+        </p:txBody>
+      </p:sp>
+      <p:sp>
+        <p:nvSpPr>
+          <p:cNvPr id="7" name="Rectangle 6"/>
+          <p:cNvSpPr/>
+          <p:nvPr/>
+        </p:nvSpPr>
+        <p:spPr>
+          <a:xfrm>
+            <a:off x="548640" y="1417320"/>
+            <a:ext cx="3566160" cy="1737360"/>
+          </a:xfrm>
+          <a:prstGeom prst="rect">
+            <a:avLst/>
+          </a:prstGeom>
+          <a:solidFill>
+            <a:srgbClr val="F2F4F8"/>
+          </a:solidFill>
+          <a:ln>
+            <a:noFill/>
+          </a:ln>
+          <a:effectLst/>
+        </p:spPr>
+        <p:style>
+          <a:lnRef idx="1">
+            <a:schemeClr val="accent1"/>
+          </a:lnRef>
+          <a:fillRef idx="3">
+            <a:schemeClr val="accent1"/>
+          </a:fillRef>
+          <a:effectRef idx="2">
+            <a:schemeClr val="accent1"/>
+          </a:effectRef>
+          <a:fontRef idx="minor">
+            <a:schemeClr val="lt1"/>
+          </a:fontRef>
+        </p:style>
+        <p:txBody>
+          <a:bodyPr rtlCol="0" anchor="ctr"/>
+          <a:lstStyle/>
+          <a:p>
+            <a:pPr algn="ctr"/>
+          </a:p>
+        </p:txBody>
+      </p:sp>
+      <p:sp>
+        <p:nvSpPr>
+          <p:cNvPr id="8" name="TextBox 7"/>
+          <p:cNvSpPr txBox="1"/>
+          <p:nvPr/>
+        </p:nvSpPr>
+        <p:spPr>
+          <a:xfrm>
+            <a:off x="685800" y="1527048"/>
+            <a:ext cx="3291840" cy="822960"/>
+          </a:xfrm>
+          <a:prstGeom prst="rect">
+            <a:avLst/>
+          </a:prstGeom>
+          <a:noFill/>
+        </p:spPr>
+        <p:txBody>
+          <a:bodyPr wrap="square" lIns="45720" rIns="45720" tIns="27432" bIns="27432" anchor="t">
+            <a:spAutoFit/>
+          </a:bodyPr>
+          <a:lstStyle/>
+          <a:p>
+            <a:pPr algn="l">
+              <a:lnSpc>
+                <a:spcPct val="105000"/>
+              </a:lnSpc>
+              <a:spcAft>
+                <a:spcPts val="400"/>
+              </a:spcAft>
+            </a:pPr>
+            <a:r>
+              <a:rPr sz="2800" b="1" i="0">
+                <a:solidFill>
+                  <a:srgbClr val="001E60"/>
+                </a:solidFill>
+                <a:latin typeface="Georgia"/>
+              </a:rPr>
+              <a:t>$8.4 to 12.4M</a:t>
+            </a:r>
+          </a:p>
+        </p:txBody>
+      </p:sp>
+      <p:sp>
+        <p:nvSpPr>
+          <p:cNvPr id="9" name="TextBox 8"/>
+          <p:cNvSpPr txBox="1"/>
+          <p:nvPr/>
+        </p:nvSpPr>
+        <p:spPr>
+          <a:xfrm>
+            <a:off x="685800" y="2007107"/>
+            <a:ext cx="3291840" cy="457200"/>
+          </a:xfrm>
+          <a:prstGeom prst="rect">
+            <a:avLst/>
+          </a:prstGeom>
+          <a:noFill/>
+        </p:spPr>
+        <p:txBody>
+          <a:bodyPr wrap="square" lIns="45720" rIns="45720" tIns="27432" bIns="27432" anchor="t">
+            <a:spAutoFit/>
+          </a:bodyPr>
+          <a:lstStyle/>
+          <a:p>
+            <a:pPr algn="l">
+              <a:lnSpc>
+                <a:spcPct val="105000"/>
+              </a:lnSpc>
+              <a:spcAft>
+                <a:spcPts val="400"/>
+              </a:spcAft>
+            </a:pPr>
+            <a:r>
+              <a:rPr sz="1500" b="1" i="0">
+                <a:solidFill>
+                  <a:srgbClr val="1F2A44"/>
+                </a:solidFill>
+                <a:latin typeface="Calibri"/>
+              </a:rPr>
+              <a:t>30% credit, eligible basis</a:t>
+            </a:r>
+          </a:p>
+        </p:txBody>
+      </p:sp>
+      <p:sp>
+        <p:nvSpPr>
+          <p:cNvPr id="10" name="TextBox 9"/>
+          <p:cNvSpPr txBox="1"/>
+          <p:nvPr/>
+        </p:nvSpPr>
+        <p:spPr>
+          <a:xfrm>
+            <a:off x="685800" y="2391156"/>
+            <a:ext cx="3291840" cy="717803"/>
+          </a:xfrm>
+          <a:prstGeom prst="rect">
+            <a:avLst/>
+          </a:prstGeom>
+          <a:noFill/>
+        </p:spPr>
+        <p:txBody>
+          <a:bodyPr wrap="square" lIns="45720" rIns="45720" tIns="27432" bIns="27432" anchor="t">
+            <a:spAutoFit/>
+          </a:bodyPr>
+          <a:lstStyle/>
+          <a:p>
+            <a:pPr algn="l">
+              <a:lnSpc>
+                <a:spcPct val="100000"/>
+              </a:lnSpc>
+              <a:spcAft>
+                <a:spcPts val="400"/>
+              </a:spcAft>
+            </a:pPr>
+            <a:r>
+              <a:rPr sz="1250" b="0" i="0">
+                <a:solidFill>
+                  <a:srgbClr val="6B7280"/>
+                </a:solidFill>
+                <a:latin typeface="Calibri"/>
+              </a:rPr>
+              <a:t>Battery, install, balance of plant ($28M); up to $41M with station, site and testing</a:t>
+            </a:r>
+          </a:p>
+        </p:txBody>
+      </p:sp>
+      <p:sp>
+        <p:nvSpPr>
+          <p:cNvPr id="11" name="Rectangle 10"/>
+          <p:cNvSpPr/>
+          <p:nvPr/>
+        </p:nvSpPr>
+        <p:spPr>
+          <a:xfrm>
+            <a:off x="4297680" y="1417320"/>
+            <a:ext cx="3566160" cy="1737360"/>
+          </a:xfrm>
+          <a:prstGeom prst="rect">
+            <a:avLst/>
+          </a:prstGeom>
+          <a:solidFill>
+            <a:srgbClr val="F2F4F8"/>
+          </a:solidFill>
+          <a:ln>
+            <a:noFill/>
+          </a:ln>
+          <a:effectLst/>
+        </p:spPr>
+        <p:style>
+          <a:lnRef idx="1">
+            <a:schemeClr val="accent1"/>
+          </a:lnRef>
+          <a:fillRef idx="3">
+            <a:schemeClr val="accent1"/>
+          </a:fillRef>
+          <a:effectRef idx="2">
+            <a:schemeClr val="accent1"/>
+          </a:effectRef>
+          <a:fontRef idx="minor">
+            <a:schemeClr val="lt1"/>
+          </a:fontRef>
+        </p:style>
+        <p:txBody>
+          <a:bodyPr rtlCol="0" anchor="ctr"/>
+          <a:lstStyle/>
+          <a:p>
+            <a:pPr algn="ctr"/>
+          </a:p>
+        </p:txBody>
+      </p:sp>
+      <p:sp>
+        <p:nvSpPr>
+          <p:cNvPr id="12" name="TextBox 11"/>
+          <p:cNvSpPr txBox="1"/>
+          <p:nvPr/>
+        </p:nvSpPr>
+        <p:spPr>
+          <a:xfrm>
+            <a:off x="4434840" y="1527048"/>
+            <a:ext cx="3291840" cy="822960"/>
+          </a:xfrm>
+          <a:prstGeom prst="rect">
+            <a:avLst/>
+          </a:prstGeom>
+          <a:noFill/>
+        </p:spPr>
+        <p:txBody>
+          <a:bodyPr wrap="square" lIns="45720" rIns="45720" tIns="27432" bIns="27432" anchor="t">
+            <a:spAutoFit/>
+          </a:bodyPr>
+          <a:lstStyle/>
+          <a:p>
+            <a:pPr algn="l">
+              <a:lnSpc>
+                <a:spcPct val="105000"/>
+              </a:lnSpc>
+              <a:spcAft>
+                <a:spcPts val="400"/>
+              </a:spcAft>
+            </a:pPr>
+            <a:r>
+              <a:rPr sz="2800" b="1" i="0">
+                <a:solidFill>
+                  <a:srgbClr val="001E60"/>
+                </a:solidFill>
+                <a:latin typeface="Georgia"/>
+              </a:rPr>
+              <a:t>+$2.8 to 4.1M</a:t>
+            </a:r>
+          </a:p>
+        </p:txBody>
+      </p:sp>
+      <p:sp>
+        <p:nvSpPr>
+          <p:cNvPr id="13" name="TextBox 12"/>
+          <p:cNvSpPr txBox="1"/>
+          <p:nvPr/>
+        </p:nvSpPr>
+        <p:spPr>
+          <a:xfrm>
+            <a:off x="4434840" y="2007107"/>
+            <a:ext cx="3291840" cy="457200"/>
+          </a:xfrm>
+          <a:prstGeom prst="rect">
+            <a:avLst/>
+          </a:prstGeom>
+          <a:noFill/>
+        </p:spPr>
+        <p:txBody>
+          <a:bodyPr wrap="square" lIns="45720" rIns="45720" tIns="27432" bIns="27432" anchor="t">
+            <a:spAutoFit/>
+          </a:bodyPr>
+          <a:lstStyle/>
+          <a:p>
+            <a:pPr algn="l">
+              <a:lnSpc>
+                <a:spcPct val="105000"/>
+              </a:lnSpc>
+              <a:spcAft>
+                <a:spcPts val="400"/>
+              </a:spcAft>
+            </a:pPr>
+            <a:r>
+              <a:rPr sz="1500" b="1" i="0">
+                <a:solidFill>
+                  <a:srgbClr val="1F2A44"/>
+                </a:solidFill>
+                <a:latin typeface="Calibri"/>
+              </a:rPr>
+              <a:t>Energy-community adder</a:t>
+            </a:r>
+          </a:p>
+        </p:txBody>
+      </p:sp>
+      <p:sp>
+        <p:nvSpPr>
+          <p:cNvPr id="14" name="TextBox 13"/>
+          <p:cNvSpPr txBox="1"/>
+          <p:nvPr/>
+        </p:nvSpPr>
+        <p:spPr>
+          <a:xfrm>
+            <a:off x="4434840" y="2391156"/>
+            <a:ext cx="3291840" cy="717803"/>
+          </a:xfrm>
+          <a:prstGeom prst="rect">
+            <a:avLst/>
+          </a:prstGeom>
+          <a:noFill/>
+        </p:spPr>
+        <p:txBody>
+          <a:bodyPr wrap="square" lIns="45720" rIns="45720" tIns="27432" bIns="27432" anchor="t">
+            <a:spAutoFit/>
+          </a:bodyPr>
+          <a:lstStyle/>
+          <a:p>
+            <a:pPr algn="l">
+              <a:lnSpc>
+                <a:spcPct val="100000"/>
+              </a:lnSpc>
+              <a:spcAft>
+                <a:spcPts val="400"/>
+              </a:spcAft>
+            </a:pPr>
+            <a:r>
+              <a:rPr sz="1250" b="0" i="0">
+                <a:solidFill>
+                  <a:srgbClr val="6B7280"/>
+                </a:solidFill>
+                <a:latin typeface="Calibri"/>
+              </a:rPr>
+              <a:t>Only if the closed landfill qualifies as a brownfield; not assumed</a:t>
+            </a:r>
+          </a:p>
+        </p:txBody>
+      </p:sp>
+      <p:sp>
+        <p:nvSpPr>
+          <p:cNvPr id="15" name="Rectangle 14"/>
+          <p:cNvSpPr/>
+          <p:nvPr/>
+        </p:nvSpPr>
+        <p:spPr>
+          <a:xfrm>
+            <a:off x="8046720" y="1417320"/>
+            <a:ext cx="3566160" cy="1737360"/>
+          </a:xfrm>
+          <a:prstGeom prst="rect">
+            <a:avLst/>
+          </a:prstGeom>
+          <a:solidFill>
+            <a:srgbClr val="F2F4F8"/>
+          </a:solidFill>
+          <a:ln>
+            <a:noFill/>
+          </a:ln>
+          <a:effectLst/>
+        </p:spPr>
+        <p:style>
+          <a:lnRef idx="1">
+            <a:schemeClr val="accent1"/>
+          </a:lnRef>
+          <a:fillRef idx="3">
+            <a:schemeClr val="accent1"/>
+          </a:fillRef>
+          <a:effectRef idx="2">
+            <a:schemeClr val="accent1"/>
+          </a:effectRef>
+          <a:fontRef idx="minor">
+            <a:schemeClr val="lt1"/>
+          </a:fontRef>
+        </p:style>
+        <p:txBody>
+          <a:bodyPr rtlCol="0" anchor="ctr"/>
+          <a:lstStyle/>
+          <a:p>
+            <a:pPr algn="ctr"/>
+          </a:p>
+        </p:txBody>
+      </p:sp>
+      <p:sp>
+        <p:nvSpPr>
+          <p:cNvPr id="16" name="TextBox 15"/>
+          <p:cNvSpPr txBox="1"/>
+          <p:nvPr/>
+        </p:nvSpPr>
+        <p:spPr>
+          <a:xfrm>
+            <a:off x="8183880" y="1527048"/>
+            <a:ext cx="3291840" cy="822960"/>
+          </a:xfrm>
+          <a:prstGeom prst="rect">
+            <a:avLst/>
+          </a:prstGeom>
+          <a:noFill/>
+        </p:spPr>
+        <p:txBody>
+          <a:bodyPr wrap="square" lIns="45720" rIns="45720" tIns="27432" bIns="27432" anchor="t">
+            <a:spAutoFit/>
+          </a:bodyPr>
+          <a:lstStyle/>
+          <a:p>
+            <a:pPr algn="l">
+              <a:lnSpc>
+                <a:spcPct val="105000"/>
+              </a:lnSpc>
+              <a:spcAft>
+                <a:spcPts val="400"/>
+              </a:spcAft>
+            </a:pPr>
+            <a:r>
+              <a:rPr sz="2800" b="1" i="0">
+                <a:solidFill>
+                  <a:srgbClr val="001E60"/>
+                </a:solidFill>
+                <a:latin typeface="Georgia"/>
+              </a:rPr>
+              <a:t>65%</a:t>
+            </a:r>
+          </a:p>
+        </p:txBody>
+      </p:sp>
+      <p:sp>
+        <p:nvSpPr>
+          <p:cNvPr id="17" name="TextBox 16"/>
+          <p:cNvSpPr txBox="1"/>
+          <p:nvPr/>
+        </p:nvSpPr>
+        <p:spPr>
+          <a:xfrm>
+            <a:off x="8183880" y="2007107"/>
+            <a:ext cx="3291840" cy="457200"/>
+          </a:xfrm>
+          <a:prstGeom prst="rect">
+            <a:avLst/>
+          </a:prstGeom>
+          <a:noFill/>
+        </p:spPr>
+        <p:txBody>
+          <a:bodyPr wrap="square" lIns="45720" rIns="45720" tIns="27432" bIns="27432" anchor="t">
+            <a:spAutoFit/>
+          </a:bodyPr>
+          <a:lstStyle/>
+          <a:p>
+            <a:pPr algn="l">
+              <a:lnSpc>
+                <a:spcPct val="105000"/>
+              </a:lnSpc>
+              <a:spcAft>
+                <a:spcPts val="400"/>
+              </a:spcAft>
+            </a:pPr>
+            <a:r>
+              <a:rPr sz="1500" b="1" i="0">
+                <a:solidFill>
+                  <a:srgbClr val="1F2A44"/>
+                </a:solidFill>
+                <a:latin typeface="Calibri"/>
+              </a:rPr>
+              <a:t>Non-PFE cost ratio</a:t>
+            </a:r>
+          </a:p>
+        </p:txBody>
+      </p:sp>
+      <p:sp>
+        <p:nvSpPr>
+          <p:cNvPr id="18" name="TextBox 17"/>
+          <p:cNvSpPr txBox="1"/>
+          <p:nvPr/>
+        </p:nvSpPr>
+        <p:spPr>
+          <a:xfrm>
+            <a:off x="8183880" y="2391156"/>
+            <a:ext cx="3291840" cy="717803"/>
+          </a:xfrm>
+          <a:prstGeom prst="rect">
+            <a:avLst/>
+          </a:prstGeom>
+          <a:noFill/>
+        </p:spPr>
+        <p:txBody>
+          <a:bodyPr wrap="square" lIns="45720" rIns="45720" tIns="27432" bIns="27432" anchor="t">
+            <a:spAutoFit/>
+          </a:bodyPr>
+          <a:lstStyle/>
+          <a:p>
+            <a:pPr algn="l">
+              <a:lnSpc>
+                <a:spcPct val="100000"/>
+              </a:lnSpc>
+              <a:spcAft>
+                <a:spcPts val="400"/>
+              </a:spcAft>
+            </a:pPr>
+            <a:r>
+              <a:rPr sz="1250" b="0" i="0">
+                <a:solidFill>
+                  <a:srgbClr val="6B7280"/>
+                </a:solidFill>
+                <a:latin typeface="Calibri"/>
+              </a:rPr>
+              <a:t>Cell origin on the Voyager units decides whether the credit is zero</a:t>
+            </a:r>
+          </a:p>
+        </p:txBody>
+      </p:sp>
+      <p:graphicFrame>
+        <p:nvGraphicFramePr>
+          <p:cNvPr id="19" name="Table 18"/>
+          <p:cNvGraphicFramePr>
+            <a:graphicFrameLocks noGrp="1"/>
+          </p:cNvGraphicFramePr>
+          <p:nvPr/>
+        </p:nvGraphicFramePr>
+        <p:xfrm>
+          <a:off x="548640" y="3383280"/>
+          <a:ext cx="11064240" cy="2286000"/>
+        </p:xfrm>
+        <a:graphic>
+          <a:graphicData uri="http://schemas.openxmlformats.org/drawingml/2006/table">
+            <a:tbl>
+              <a:tblPr firstRow="1" bandRow="1">
+                <a:tableStyleId>{5C22544A-7EE6-4342-B048-85BDC9FD1C3A}</a:tableStyleId>
+              </a:tblPr>
+              <a:tblGrid>
+                <a:gridCol w="4754880"/>
+                <a:gridCol w="2194560"/>
+                <a:gridCol w="1371600"/>
+                <a:gridCol w="2743200"/>
+              </a:tblGrid>
+              <a:tr h="457200">
+                <a:tc>
+                  <a:txBody>
+                    <a:bodyPr/>
+                    <a:lstStyle/>
+                    <a:p>
+                      <a:r>
+                        <a:rPr sz="1200" b="1">
+                          <a:solidFill>
+                            <a:srgbClr val="FFFFFF"/>
+                          </a:solidFill>
+                          <a:latin typeface="Calibri"/>
+                        </a:rPr>
+                        <a:t>Decision</a:t>
+                      </a:r>
+                    </a:p>
+                  </a:txBody>
+                  <a:tcPr marL="54864" marR="54864" marT="27432" marB="27432">
+                    <a:solidFill>
+                      <a:srgbClr val="001E60"/>
+                    </a:solidFill>
+                  </a:tcPr>
+                </a:tc>
+                <a:tc>
+                  <a:txBody>
+                    <a:bodyPr/>
+                    <a:lstStyle/>
+                    <a:p>
+                      <a:r>
+                        <a:rPr sz="1200" b="1">
+                          <a:solidFill>
+                            <a:srgbClr val="FFFFFF"/>
+                          </a:solidFill>
+                          <a:latin typeface="Calibri"/>
+                        </a:rPr>
+                        <a:t>Owner</a:t>
+                      </a:r>
+                    </a:p>
+                  </a:txBody>
+                  <a:tcPr marL="54864" marR="54864" marT="27432" marB="27432">
+                    <a:solidFill>
+                      <a:srgbClr val="001E60"/>
+                    </a:solidFill>
+                  </a:tcPr>
+                </a:tc>
+                <a:tc>
+                  <a:txBody>
+                    <a:bodyPr/>
+                    <a:lstStyle/>
+                    <a:p>
+                      <a:r>
+                        <a:rPr sz="1200" b="1">
+                          <a:solidFill>
+                            <a:srgbClr val="FFFFFF"/>
+                          </a:solidFill>
+                          <a:latin typeface="Calibri"/>
+                        </a:rPr>
+                        <a:t>By</a:t>
+                      </a:r>
+                    </a:p>
+                  </a:txBody>
+                  <a:tcPr marL="54864" marR="54864" marT="27432" marB="27432">
+                    <a:solidFill>
+                      <a:srgbClr val="001E60"/>
+                    </a:solidFill>
+                  </a:tcPr>
+                </a:tc>
+                <a:tc>
+                  <a:txBody>
+                    <a:bodyPr/>
+                    <a:lstStyle/>
+                    <a:p>
+                      <a:r>
+                        <a:rPr sz="1200" b="1">
+                          <a:solidFill>
+                            <a:srgbClr val="FFFFFF"/>
+                          </a:solidFill>
+                          <a:latin typeface="Calibri"/>
+                        </a:rPr>
+                        <a:t>Why it matters</a:t>
+                      </a:r>
+                    </a:p>
+                  </a:txBody>
+                  <a:tcPr marL="54864" marR="54864" marT="27432" marB="27432">
+                    <a:solidFill>
+                      <a:srgbClr val="001E60"/>
+                    </a:solidFill>
+                  </a:tcPr>
+                </a:tc>
+              </a:tr>
+              <a:tr h="457200">
+                <a:tc>
+                  <a:txBody>
+                    <a:bodyPr/>
+                    <a:lstStyle/>
+                    <a:p>
+                      <a:r>
+                        <a:rPr sz="1200" b="0">
+                          <a:solidFill>
+                            <a:srgbClr val="1F2A44"/>
+                          </a:solidFill>
+                          <a:latin typeface="Calibri"/>
+                        </a:rPr>
+                        <a:t>Eligible-basis opinion: which layers are energy storage property</a:t>
+                      </a:r>
+                    </a:p>
+                  </a:txBody>
+                  <a:tcPr marL="54864" marR="54864" marT="27432" marB="27432" anchor="ctr">
+                    <a:solidFill>
+                      <a:srgbClr val="FFFFFF"/>
+                    </a:solidFill>
+                  </a:tcPr>
+                </a:tc>
+                <a:tc>
+                  <a:txBody>
+                    <a:bodyPr/>
+                    <a:lstStyle/>
+                    <a:p>
+                      <a:r>
+                        <a:rPr sz="1200" b="0">
+                          <a:solidFill>
+                            <a:srgbClr val="1F2A44"/>
+                          </a:solidFill>
+                          <a:latin typeface="Calibri"/>
+                        </a:rPr>
+                        <a:t>Tax</a:t>
+                      </a:r>
+                    </a:p>
+                  </a:txBody>
+                  <a:tcPr marL="54864" marR="54864" marT="27432" marB="27432" anchor="ctr">
+                    <a:solidFill>
+                      <a:srgbClr val="FFFFFF"/>
+                    </a:solidFill>
+                  </a:tcPr>
+                </a:tc>
+                <a:tc>
+                  <a:txBody>
+                    <a:bodyPr/>
+                    <a:lstStyle/>
+                    <a:p>
+                      <a:r>
+                        <a:rPr sz="1200" b="0">
+                          <a:solidFill>
+                            <a:srgbClr val="1F2A44"/>
+                          </a:solidFill>
+                          <a:latin typeface="Calibri"/>
+                        </a:rPr>
+                        <a:t>Dec 2026</a:t>
+                      </a:r>
+                    </a:p>
+                  </a:txBody>
+                  <a:tcPr marL="54864" marR="54864" marT="27432" marB="27432" anchor="ctr">
+                    <a:solidFill>
+                      <a:srgbClr val="FFFFFF"/>
+                    </a:solidFill>
+                  </a:tcPr>
+                </a:tc>
+                <a:tc>
+                  <a:txBody>
+                    <a:bodyPr/>
+                    <a:lstStyle/>
+                    <a:p>
+                      <a:r>
+                        <a:rPr sz="1200" b="0">
+                          <a:solidFill>
+                            <a:srgbClr val="1F2A44"/>
+                          </a:solidFill>
+                          <a:latin typeface="Calibri"/>
+                        </a:rPr>
+                        <a:t>Sets the $28M to $41M range</a:t>
+                      </a:r>
+                    </a:p>
+                  </a:txBody>
+                  <a:tcPr marL="54864" marR="54864" marT="27432" marB="27432" anchor="ctr">
+                    <a:solidFill>
+                      <a:srgbClr val="FFFFFF"/>
+                    </a:solidFill>
+                  </a:tcPr>
+                </a:tc>
+              </a:tr>
+              <a:tr h="457200">
+                <a:tc>
+                  <a:txBody>
+                    <a:bodyPr/>
+                    <a:lstStyle/>
+                    <a:p>
+                      <a:r>
+                        <a:rPr sz="1200" b="0">
+                          <a:solidFill>
+                            <a:srgbClr val="1F2A44"/>
+                          </a:solidFill>
+                          <a:latin typeface="Calibri"/>
+                        </a:rPr>
+                        <a:t>FEOC cost-ratio test on the Nomad cells (Notice 2026-15)</a:t>
+                      </a:r>
+                    </a:p>
+                  </a:txBody>
+                  <a:tcPr marL="54864" marR="54864" marT="27432" marB="27432" anchor="ctr">
+                    <a:solidFill>
+                      <a:srgbClr val="F2F4F8"/>
+                    </a:solidFill>
+                  </a:tcPr>
+                </a:tc>
+                <a:tc>
+                  <a:txBody>
+                    <a:bodyPr/>
+                    <a:lstStyle/>
+                    <a:p>
+                      <a:r>
+                        <a:rPr sz="1200" b="0">
+                          <a:solidFill>
+                            <a:srgbClr val="1F2A44"/>
+                          </a:solidFill>
+                          <a:latin typeface="Calibri"/>
+                        </a:rPr>
+                        <a:t>Tax + Sourcing + Nomad</a:t>
+                      </a:r>
+                    </a:p>
+                  </a:txBody>
+                  <a:tcPr marL="54864" marR="54864" marT="27432" marB="27432" anchor="ctr">
+                    <a:solidFill>
+                      <a:srgbClr val="F2F4F8"/>
+                    </a:solidFill>
+                  </a:tcPr>
+                </a:tc>
+                <a:tc>
+                  <a:txBody>
+                    <a:bodyPr/>
+                    <a:lstStyle/>
+                    <a:p>
+                      <a:r>
+                        <a:rPr sz="1200" b="0">
+                          <a:solidFill>
+                            <a:srgbClr val="1F2A44"/>
+                          </a:solidFill>
+                          <a:latin typeface="Calibri"/>
+                        </a:rPr>
+                        <a:t>Before final drawings</a:t>
+                      </a:r>
+                    </a:p>
+                  </a:txBody>
+                  <a:tcPr marL="54864" marR="54864" marT="27432" marB="27432" anchor="ctr">
+                    <a:solidFill>
+                      <a:srgbClr val="F2F4F8"/>
+                    </a:solidFill>
+                  </a:tcPr>
+                </a:tc>
+                <a:tc>
+                  <a:txBody>
+                    <a:bodyPr/>
+                    <a:lstStyle/>
+                    <a:p>
+                      <a:r>
+                        <a:rPr sz="1200" b="0">
+                          <a:solidFill>
+                            <a:srgbClr val="1F2A44"/>
+                          </a:solidFill>
+                          <a:latin typeface="Calibri"/>
+                        </a:rPr>
+                        <a:t>A failed test is a zero credit</a:t>
+                      </a:r>
+                    </a:p>
+                  </a:txBody>
+                  <a:tcPr marL="54864" marR="54864" marT="27432" marB="27432" anchor="ctr">
+                    <a:solidFill>
+                      <a:srgbClr val="F2F4F8"/>
+                    </a:solidFill>
+                  </a:tcPr>
+                </a:tc>
+              </a:tr>
+              <a:tr h="457200">
+                <a:tc>
+                  <a:txBody>
+                    <a:bodyPr/>
+                    <a:lstStyle/>
+                    <a:p>
+                      <a:r>
+                        <a:rPr sz="1200" b="0">
+                          <a:solidFill>
+                            <a:srgbClr val="1F2A44"/>
+                          </a:solidFill>
+                          <a:latin typeface="Calibri"/>
+                        </a:rPr>
+                        <a:t>Normalization election; DPU treatment of the credit</a:t>
+                      </a:r>
+                    </a:p>
+                  </a:txBody>
+                  <a:tcPr marL="54864" marR="54864" marT="27432" marB="27432" anchor="ctr">
+                    <a:solidFill>
+                      <a:srgbClr val="FFFFFF"/>
+                    </a:solidFill>
+                  </a:tcPr>
+                </a:tc>
+                <a:tc>
+                  <a:txBody>
+                    <a:bodyPr/>
+                    <a:lstStyle/>
+                    <a:p>
+                      <a:r>
+                        <a:rPr sz="1200" b="0">
+                          <a:solidFill>
+                            <a:srgbClr val="1F2A44"/>
+                          </a:solidFill>
+                          <a:latin typeface="Calibri"/>
+                        </a:rPr>
+                        <a:t>Regulatory</a:t>
+                      </a:r>
+                    </a:p>
+                  </a:txBody>
+                  <a:tcPr marL="54864" marR="54864" marT="27432" marB="27432" anchor="ctr">
+                    <a:solidFill>
+                      <a:srgbClr val="FFFFFF"/>
+                    </a:solidFill>
+                  </a:tcPr>
+                </a:tc>
+                <a:tc>
+                  <a:txBody>
+                    <a:bodyPr/>
+                    <a:lstStyle/>
+                    <a:p>
+                      <a:r>
+                        <a:rPr sz="1200" b="0">
+                          <a:solidFill>
+                            <a:srgbClr val="1F2A44"/>
+                          </a:solidFill>
+                          <a:latin typeface="Calibri"/>
+                        </a:rPr>
+                        <a:t>2027 filing</a:t>
+                      </a:r>
+                    </a:p>
+                  </a:txBody>
+                  <a:tcPr marL="54864" marR="54864" marT="27432" marB="27432" anchor="ctr">
+                    <a:solidFill>
+                      <a:srgbClr val="FFFFFF"/>
+                    </a:solidFill>
+                  </a:tcPr>
+                </a:tc>
+                <a:tc>
+                  <a:txBody>
+                    <a:bodyPr/>
+                    <a:lstStyle/>
+                    <a:p>
+                      <a:r>
+                        <a:rPr sz="1200" b="0">
+                          <a:solidFill>
+                            <a:srgbClr val="1F2A44"/>
+                          </a:solidFill>
+                          <a:latin typeface="Calibri"/>
+                        </a:rPr>
+                        <a:t>Decides how fast customers see it</a:t>
+                      </a:r>
+                    </a:p>
+                  </a:txBody>
+                  <a:tcPr marL="54864" marR="54864" marT="27432" marB="27432" anchor="ctr">
+                    <a:solidFill>
+                      <a:srgbClr val="FFFFFF"/>
+                    </a:solidFill>
+                  </a:tcPr>
+                </a:tc>
+              </a:tr>
+              <a:tr h="457200">
+                <a:tc>
+                  <a:txBody>
+                    <a:bodyPr/>
+                    <a:lstStyle/>
+                    <a:p>
+                      <a:r>
+                        <a:rPr sz="1200" b="0">
+                          <a:solidFill>
+                            <a:srgbClr val="1F2A44"/>
+                          </a:solidFill>
+                          <a:latin typeface="Calibri"/>
+                        </a:rPr>
+                        <a:t>Prevailing wage and apprenticeship in the construction contracts</a:t>
+                      </a:r>
+                    </a:p>
+                  </a:txBody>
+                  <a:tcPr marL="54864" marR="54864" marT="27432" marB="27432" anchor="ctr">
+                    <a:solidFill>
+                      <a:srgbClr val="F2F4F8"/>
+                    </a:solidFill>
+                  </a:tcPr>
+                </a:tc>
+                <a:tc>
+                  <a:txBody>
+                    <a:bodyPr/>
+                    <a:lstStyle/>
+                    <a:p>
+                      <a:r>
+                        <a:rPr sz="1200" b="0">
+                          <a:solidFill>
+                            <a:srgbClr val="1F2A44"/>
+                          </a:solidFill>
+                          <a:latin typeface="Calibri"/>
+                        </a:rPr>
+                        <a:t>Sourcing + Construction</a:t>
+                      </a:r>
+                    </a:p>
+                  </a:txBody>
+                  <a:tcPr marL="54864" marR="54864" marT="27432" marB="27432" anchor="ctr">
+                    <a:solidFill>
+                      <a:srgbClr val="F2F4F8"/>
+                    </a:solidFill>
+                  </a:tcPr>
+                </a:tc>
+                <a:tc>
+                  <a:txBody>
+                    <a:bodyPr/>
+                    <a:lstStyle/>
+                    <a:p>
+                      <a:r>
+                        <a:rPr sz="1200" b="0">
+                          <a:solidFill>
+                            <a:srgbClr val="1F2A44"/>
+                          </a:solidFill>
+                          <a:latin typeface="Calibri"/>
+                        </a:rPr>
+                        <a:t>Gate 3</a:t>
+                      </a:r>
+                    </a:p>
+                  </a:txBody>
+                  <a:tcPr marL="54864" marR="54864" marT="27432" marB="27432" anchor="ctr">
+                    <a:solidFill>
+                      <a:srgbClr val="F2F4F8"/>
+                    </a:solidFill>
+                  </a:tcPr>
+                </a:tc>
+                <a:tc>
+                  <a:txBody>
+                    <a:bodyPr/>
+                    <a:lstStyle/>
+                    <a:p>
+                      <a:r>
+                        <a:rPr sz="1200" b="0">
+                          <a:solidFill>
+                            <a:srgbClr val="1F2A44"/>
+                          </a:solidFill>
+                          <a:latin typeface="Calibri"/>
+                        </a:rPr>
+                        <a:t>6% credit becomes 30%</a:t>
+                      </a:r>
+                    </a:p>
+                  </a:txBody>
+                  <a:tcPr marL="54864" marR="54864" marT="27432" marB="27432" anchor="ctr">
+                    <a:solidFill>
+                      <a:srgbClr val="F2F4F8"/>
+                    </a:solidFill>
+                  </a:tcPr>
+                </a:tc>
+              </a:tr>
+            </a:tbl>
+          </a:graphicData>
+        </a:graphic>
+      </p:graphicFrame>
+      <p:sp>
+        <p:nvSpPr>
+          <p:cNvPr id="20" name="TextBox 19"/>
+          <p:cNvSpPr txBox="1"/>
+          <p:nvPr/>
+        </p:nvSpPr>
+        <p:spPr>
+          <a:xfrm>
+            <a:off x="548640" y="5806440"/>
+            <a:ext cx="11064240" cy="548640"/>
+          </a:xfrm>
+          <a:prstGeom prst="rect">
+            <a:avLst/>
+          </a:prstGeom>
+          <a:noFill/>
+        </p:spPr>
+        <p:txBody>
+          <a:bodyPr wrap="square" lIns="45720">
+            <a:spAutoFit/>
+          </a:bodyPr>
+          <a:lstStyle/>
+          <a:p>
+            <a:pPr>
+              <a:lnSpc>
+                <a:spcPct val="105000"/>
+              </a:lnSpc>
+              <a:spcAft>
+                <a:spcPts val="600"/>
+              </a:spcAft>
+            </a:pPr>
+            <a:r>
+              <a:rPr sz="1400">
+                <a:solidFill>
+                  <a:srgbClr val="FFC72C"/>
+                </a:solidFill>
+                <a:latin typeface="Calibri"/>
+              </a:rPr>
+              <a:t>▪  </a:t>
+            </a:r>
+            <a:r>
+              <a:rPr b="1" sz="1400">
+                <a:solidFill>
+                  <a:srgbClr val="1F2A44"/>
+                </a:solidFill>
+                <a:latin typeface="Calibri"/>
+              </a:rPr>
+              <a:t>The ask: </a:t>
+            </a:r>
+            <a:r>
+              <a:rPr sz="1400">
+                <a:solidFill>
+                  <a:srgbClr val="1F2A44"/>
+                </a:solidFill>
+                <a:latin typeface="Calibri"/>
+              </a:rPr>
+              <a:t>open the 48E memo with Tax this month. It is larger than every estimate lever combined and it has a construction-start deadline.</a:t>
+            </a:r>
+          </a:p>
+        </p:txBody>
+      </p:sp>
+    </p:spTree>
+  </p:cSld>
+  <p:clrMapOvr>
+    <a:masterClrMapping/>
+  </p:clrMapOvr>
+</p:sld>
+</file>
+
+<file path=ppt/slides/slide8.xml><?xml version="1.0" encoding="utf-8"?>
+<p:sld xmlns:a="http://schemas.openxmlformats.org/drawingml/2006/main" xmlns:p="http://schemas.openxmlformats.org/presentationml/2006/main" xmlns:r="http://schemas.openxmlformats.org/officeDocument/2006/relationships">
+  <p:cSld>
+    <p:spTree>
+      <p:nvGrpSpPr>
+        <p:cNvPr id="1" name=""/>
+        <p:cNvGrpSpPr/>
+        <p:nvPr/>
+      </p:nvGrpSpPr>
+      <p:grpSpPr/>
+      <p:sp>
+        <p:nvSpPr>
+          <p:cNvPr id="2" name="Rectangle 1"/>
+          <p:cNvSpPr/>
+          <p:nvPr/>
+        </p:nvSpPr>
+        <p:spPr>
+          <a:xfrm>
+            <a:off x="0" y="0"/>
+            <a:ext cx="12191695" cy="6858000"/>
+          </a:xfrm>
+          <a:prstGeom prst="rect">
+            <a:avLst/>
+          </a:prstGeom>
+          <a:solidFill>
+            <a:srgbClr val="FFFFFF"/>
+          </a:solidFill>
+          <a:ln>
+            <a:noFill/>
+          </a:ln>
+          <a:effectLst/>
+        </p:spPr>
+        <p:style>
+          <a:lnRef idx="1">
+            <a:schemeClr val="accent1"/>
+          </a:lnRef>
+          <a:fillRef idx="3">
+            <a:schemeClr val="accent1"/>
+          </a:fillRef>
+          <a:effectRef idx="2">
+            <a:schemeClr val="accent1"/>
+          </a:effectRef>
+          <a:fontRef idx="minor">
+            <a:schemeClr val="lt1"/>
+          </a:fontRef>
+        </p:style>
+        <p:txBody>
+          <a:bodyPr rtlCol="0" anchor="ctr"/>
+          <a:lstStyle/>
+          <a:p>
+            <a:pPr algn="ctr"/>
+          </a:p>
+        </p:txBody>
+      </p:sp>
+      <p:sp>
+        <p:nvSpPr>
+          <p:cNvPr id="3" name="TextBox 2"/>
+          <p:cNvSpPr txBox="1"/>
+          <p:nvPr/>
+        </p:nvSpPr>
+        <p:spPr>
+          <a:xfrm>
+            <a:off x="548640" y="256032"/>
+            <a:ext cx="11064240" cy="274320"/>
+          </a:xfrm>
+          <a:prstGeom prst="rect">
+            <a:avLst/>
+          </a:prstGeom>
+          <a:noFill/>
+        </p:spPr>
+        <p:txBody>
+          <a:bodyPr wrap="square" lIns="45720" rIns="45720" tIns="27432" bIns="27432" anchor="t">
+            <a:spAutoFit/>
+          </a:bodyPr>
+          <a:lstStyle/>
+          <a:p>
+            <a:pPr algn="l">
+              <a:lnSpc>
+                <a:spcPct val="105000"/>
+              </a:lnSpc>
+              <a:spcAft>
+                <a:spcPts val="400"/>
+              </a:spcAft>
+            </a:pPr>
+            <a:r>
+              <a:rPr sz="1100" b="1" i="0">
+                <a:solidFill>
+                  <a:srgbClr val="6E1F2E"/>
+                </a:solidFill>
+                <a:latin typeface="Calibri"/>
+              </a:rPr>
+              <a:t>GATE 2: DESIGN-TO-COST (BEFORE IFC, MID-2027)</a:t>
+            </a:r>
+          </a:p>
+        </p:txBody>
+      </p:sp>
+      <p:sp>
+        <p:nvSpPr>
+          <p:cNvPr id="4" name="TextBox 3"/>
+          <p:cNvSpPr txBox="1"/>
+          <p:nvPr/>
+        </p:nvSpPr>
+        <p:spPr>
+          <a:xfrm>
+            <a:off x="548640" y="475488"/>
+            <a:ext cx="11064240" cy="868680"/>
+          </a:xfrm>
+          <a:prstGeom prst="rect">
+            <a:avLst/>
+          </a:prstGeom>
+          <a:noFill/>
+        </p:spPr>
+        <p:txBody>
+          <a:bodyPr wrap="square" lIns="45720" rIns="45720" tIns="27432" bIns="27432" anchor="t">
+            <a:spAutoFit/>
+          </a:bodyPr>
+          <a:lstStyle/>
+          <a:p>
+            <a:pPr algn="l">
+              <a:lnSpc>
+                <a:spcPct val="100000"/>
+              </a:lnSpc>
+              <a:spcAft>
+                <a:spcPts val="400"/>
+              </a:spcAft>
+            </a:pPr>
+            <a:r>
+              <a:rPr sz="2300" b="1" i="0">
+                <a:solidFill>
+                  <a:srgbClr val="001E60"/>
+                </a:solidFill>
+                <a:latin typeface="Georgia"/>
+              </a:rPr>
+              <a:t>Hold it: a station-direct target of $1,250 per kWh, $50M loaded, with change control and a monthly number</a:t>
+            </a:r>
+          </a:p>
+        </p:txBody>
+      </p:sp>
+      <p:sp>
+        <p:nvSpPr>
+          <p:cNvPr id="5" name="TextBox 4"/>
+          <p:cNvSpPr txBox="1"/>
+          <p:nvPr/>
+        </p:nvSpPr>
+        <p:spPr>
+          <a:xfrm>
+            <a:off x="548640" y="6419088"/>
+            <a:ext cx="8229600" cy="274320"/>
+          </a:xfrm>
+          <a:prstGeom prst="rect">
+            <a:avLst/>
+          </a:prstGeom>
+          <a:noFill/>
+        </p:spPr>
+        <p:txBody>
+          <a:bodyPr wrap="square" lIns="45720" rIns="45720" tIns="27432" bIns="27432" anchor="t">
+            <a:spAutoFit/>
+          </a:bodyPr>
+          <a:lstStyle/>
+          <a:p>
+            <a:pPr algn="l">
+              <a:lnSpc>
+                <a:spcPct val="105000"/>
+              </a:lnSpc>
+              <a:spcAft>
+                <a:spcPts val="400"/>
+              </a:spcAft>
+            </a:pPr>
+            <a:r>
+              <a:rPr sz="1000" b="0" i="0">
+                <a:solidFill>
+                  <a:srgbClr val="6B7280"/>
+                </a:solidFill>
+                <a:latin typeface="Calibri"/>
+              </a:rPr>
+              <a:t>EstimatingCoE | Eversource Energy | Stewards of Affordability</a:t>
+            </a:r>
+          </a:p>
+        </p:txBody>
+      </p:sp>
+      <p:sp>
+        <p:nvSpPr>
+          <p:cNvPr id="6" name="TextBox 5"/>
+          <p:cNvSpPr txBox="1"/>
+          <p:nvPr/>
+        </p:nvSpPr>
+        <p:spPr>
+          <a:xfrm>
+            <a:off x="10972800" y="6419088"/>
+            <a:ext cx="685800" cy="274320"/>
+          </a:xfrm>
+          <a:prstGeom prst="rect">
+            <a:avLst/>
+          </a:prstGeom>
+          <a:noFill/>
+        </p:spPr>
+        <p:txBody>
+          <a:bodyPr wrap="square" lIns="45720" rIns="45720" tIns="27432" bIns="27432" anchor="t">
+            <a:spAutoFit/>
+          </a:bodyPr>
+          <a:lstStyle/>
+          <a:p>
+            <a:pPr algn="r">
+              <a:lnSpc>
+                <a:spcPct val="105000"/>
+              </a:lnSpc>
+              <a:spcAft>
+                <a:spcPts val="400"/>
+              </a:spcAft>
+            </a:pPr>
+            <a:r>
+              <a:rPr sz="1000" b="0" i="0">
+                <a:solidFill>
+                  <a:srgbClr val="6B7280"/>
+                </a:solidFill>
+                <a:latin typeface="Calibri"/>
+              </a:rPr>
+              <a:t>8</a:t>
             </a:r>
           </a:p>
         </p:txBody>
@@ -17522,7 +19423,7 @@
 </p:sld>
 </file>
 
-<file path=ppt/slides/slide8.xml><?xml version="1.0" encoding="utf-8"?>
+<file path=ppt/slides/slide9.xml><?xml version="1.0" encoding="utf-8"?>
 <p:sld xmlns:a="http://schemas.openxmlformats.org/drawingml/2006/main" xmlns:p="http://schemas.openxmlformats.org/presentationml/2006/main" xmlns:r="http://schemas.openxmlformats.org/officeDocument/2006/relationships">
   <p:cSld>
     <p:spTree>
@@ -17739,7 +19640,7 @@
                 </a:solidFill>
                 <a:latin typeface="Calibri"/>
               </a:rPr>
-              <a:t>8</a:t>
+              <a:t>9</a:t>
             </a:r>
           </a:p>
         </p:txBody>
@@ -18231,7 +20132,7 @@
                           </a:solidFill>
                           <a:latin typeface="Calibri"/>
                         </a:rPr>
-                        <a:t>Outage windows at Station 496 priced explicitly</a:t>
+                        <a:t>Outage windows at Station 496 priced explicitly for whatever work remains</a:t>
                       </a:r>
                     </a:p>
                   </a:txBody>
@@ -18253,7 +20154,7 @@
                           </a:solidFill>
                           <a:latin typeface="Calibri"/>
                         </a:rPr>
-                        <a:t>The relay program's outage premium is unpriced today</a:t>
+                        <a:t>Unpriced today; small if the relay program goes</a:t>
                       </a:r>
                     </a:p>
                   </a:txBody>
@@ -18368,431 +20269,6 @@
                 <a:latin typeface="Calibri"/>
               </a:rPr>
               <a:t>approve the contracting strategy at Gate 3 rather than defaulting to the alliance contractor on unit rates. The simulation's two largest accuracy ranges, the civil layer and Station 496, are both unit-library numbers with no bid behind them.</a:t>
-            </a:r>
-          </a:p>
-        </p:txBody>
-      </p:sp>
-    </p:spTree>
-  </p:cSld>
-  <p:clrMapOvr>
-    <a:masterClrMapping/>
-  </p:clrMapOvr>
-</p:sld>
-</file>
-
-<file path=ppt/slides/slide9.xml><?xml version="1.0" encoding="utf-8"?>
-<p:sld xmlns:a="http://schemas.openxmlformats.org/drawingml/2006/main" xmlns:p="http://schemas.openxmlformats.org/presentationml/2006/main" xmlns:r="http://schemas.openxmlformats.org/officeDocument/2006/relationships">
-  <p:cSld>
-    <p:spTree>
-      <p:nvGrpSpPr>
-        <p:cNvPr id="1" name=""/>
-        <p:cNvGrpSpPr/>
-        <p:nvPr/>
-      </p:nvGrpSpPr>
-      <p:grpSpPr/>
-      <p:sp>
-        <p:nvSpPr>
-          <p:cNvPr id="2" name="Rectangle 1"/>
-          <p:cNvSpPr/>
-          <p:nvPr/>
-        </p:nvSpPr>
-        <p:spPr>
-          <a:xfrm>
-            <a:off x="0" y="0"/>
-            <a:ext cx="12191695" cy="6858000"/>
-          </a:xfrm>
-          <a:prstGeom prst="rect">
-            <a:avLst/>
-          </a:prstGeom>
-          <a:solidFill>
-            <a:srgbClr val="FFFFFF"/>
-          </a:solidFill>
-          <a:ln>
-            <a:noFill/>
-          </a:ln>
-          <a:effectLst/>
-        </p:spPr>
-        <p:style>
-          <a:lnRef idx="1">
-            <a:schemeClr val="accent1"/>
-          </a:lnRef>
-          <a:fillRef idx="3">
-            <a:schemeClr val="accent1"/>
-          </a:fillRef>
-          <a:effectRef idx="2">
-            <a:schemeClr val="accent1"/>
-          </a:effectRef>
-          <a:fontRef idx="minor">
-            <a:schemeClr val="lt1"/>
-          </a:fontRef>
-        </p:style>
-        <p:txBody>
-          <a:bodyPr rtlCol="0" anchor="ctr"/>
-          <a:lstStyle/>
-          <a:p>
-            <a:pPr algn="ctr"/>
-          </a:p>
-        </p:txBody>
-      </p:sp>
-      <p:sp>
-        <p:nvSpPr>
-          <p:cNvPr id="3" name="TextBox 2"/>
-          <p:cNvSpPr txBox="1"/>
-          <p:nvPr/>
-        </p:nvSpPr>
-        <p:spPr>
-          <a:xfrm>
-            <a:off x="548640" y="256032"/>
-            <a:ext cx="11064240" cy="274320"/>
-          </a:xfrm>
-          <a:prstGeom prst="rect">
-            <a:avLst/>
-          </a:prstGeom>
-          <a:noFill/>
-        </p:spPr>
-        <p:txBody>
-          <a:bodyPr wrap="square" lIns="45720" rIns="45720" tIns="27432" bIns="27432" anchor="t">
-            <a:spAutoFit/>
-          </a:bodyPr>
-          <a:lstStyle/>
-          <a:p>
-            <a:pPr algn="l">
-              <a:lnSpc>
-                <a:spcPct val="105000"/>
-              </a:lnSpc>
-              <a:spcAft>
-                <a:spcPts val="400"/>
-              </a:spcAft>
-            </a:pPr>
-            <a:r>
-              <a:rPr sz="1100" b="1" i="0">
-                <a:solidFill>
-                  <a:srgbClr val="6E1F2E"/>
-                </a:solidFill>
-                <a:latin typeface="Calibri"/>
-              </a:rPr>
-              <a:t>WHAT MUST BE MANAGED SO THE SAVINGS STICK</a:t>
-            </a:r>
-          </a:p>
-        </p:txBody>
-      </p:sp>
-      <p:sp>
-        <p:nvSpPr>
-          <p:cNvPr id="4" name="TextBox 3"/>
-          <p:cNvSpPr txBox="1"/>
-          <p:nvPr/>
-        </p:nvSpPr>
-        <p:spPr>
-          <a:xfrm>
-            <a:off x="548640" y="475488"/>
-            <a:ext cx="11064240" cy="868680"/>
-          </a:xfrm>
-          <a:prstGeom prst="rect">
-            <a:avLst/>
-          </a:prstGeom>
-          <a:noFill/>
-        </p:spPr>
-        <p:txBody>
-          <a:bodyPr wrap="square" lIns="45720" rIns="45720" tIns="27432" bIns="27432" anchor="t">
-            <a:spAutoFit/>
-          </a:bodyPr>
-          <a:lstStyle/>
-          <a:p>
-            <a:pPr algn="l">
-              <a:lnSpc>
-                <a:spcPct val="100000"/>
-              </a:lnSpc>
-              <a:spcAft>
-                <a:spcPts val="400"/>
-              </a:spcAft>
-            </a:pPr>
-            <a:r>
-              <a:rPr sz="2300" b="1" i="0">
-                <a:solidFill>
-                  <a:srgbClr val="001E60"/>
-                </a:solidFill>
-                <a:latin typeface="Georgia"/>
-              </a:rPr>
-              <a:t>Two risks can eat every dollar saved: the Haugland reconciliation and the siting calendar. Both have an owner and a date.</a:t>
-            </a:r>
-          </a:p>
-        </p:txBody>
-      </p:sp>
-      <p:sp>
-        <p:nvSpPr>
-          <p:cNvPr id="5" name="TextBox 4"/>
-          <p:cNvSpPr txBox="1"/>
-          <p:nvPr/>
-        </p:nvSpPr>
-        <p:spPr>
-          <a:xfrm>
-            <a:off x="548640" y="6419088"/>
-            <a:ext cx="8229600" cy="274320"/>
-          </a:xfrm>
-          <a:prstGeom prst="rect">
-            <a:avLst/>
-          </a:prstGeom>
-          <a:noFill/>
-        </p:spPr>
-        <p:txBody>
-          <a:bodyPr wrap="square" lIns="45720" rIns="45720" tIns="27432" bIns="27432" anchor="t">
-            <a:spAutoFit/>
-          </a:bodyPr>
-          <a:lstStyle/>
-          <a:p>
-            <a:pPr algn="l">
-              <a:lnSpc>
-                <a:spcPct val="105000"/>
-              </a:lnSpc>
-              <a:spcAft>
-                <a:spcPts val="400"/>
-              </a:spcAft>
-            </a:pPr>
-            <a:r>
-              <a:rPr sz="1000" b="0" i="0">
-                <a:solidFill>
-                  <a:srgbClr val="6B7280"/>
-                </a:solidFill>
-                <a:latin typeface="Calibri"/>
-              </a:rPr>
-              <a:t>EstimatingCoE | Eversource Energy | Stewards of Affordability</a:t>
-            </a:r>
-          </a:p>
-        </p:txBody>
-      </p:sp>
-      <p:sp>
-        <p:nvSpPr>
-          <p:cNvPr id="6" name="TextBox 5"/>
-          <p:cNvSpPr txBox="1"/>
-          <p:nvPr/>
-        </p:nvSpPr>
-        <p:spPr>
-          <a:xfrm>
-            <a:off x="10972800" y="6419088"/>
-            <a:ext cx="685800" cy="274320"/>
-          </a:xfrm>
-          <a:prstGeom prst="rect">
-            <a:avLst/>
-          </a:prstGeom>
-          <a:noFill/>
-        </p:spPr>
-        <p:txBody>
-          <a:bodyPr wrap="square" lIns="45720" rIns="45720" tIns="27432" bIns="27432" anchor="t">
-            <a:spAutoFit/>
-          </a:bodyPr>
-          <a:lstStyle/>
-          <a:p>
-            <a:pPr algn="r">
-              <a:lnSpc>
-                <a:spcPct val="105000"/>
-              </a:lnSpc>
-              <a:spcAft>
-                <a:spcPts val="400"/>
-              </a:spcAft>
-            </a:pPr>
-            <a:r>
-              <a:rPr sz="1000" b="0" i="0">
-                <a:solidFill>
-                  <a:srgbClr val="6B7280"/>
-                </a:solidFill>
-                <a:latin typeface="Calibri"/>
-              </a:rPr>
-              <a:t>9</a:t>
-            </a:r>
-          </a:p>
-        </p:txBody>
-      </p:sp>
-      <p:pic>
-        <p:nvPicPr>
-          <p:cNvPr id="7" name="Picture 6" descr="mc_lead_tornado.png"/>
-          <p:cNvPicPr>
-            <a:picLocks noChangeAspect="1"/>
-          </p:cNvPicPr>
-          <p:nvPr/>
-        </p:nvPicPr>
-        <p:blipFill>
-          <a:blip r:embed="rId2"/>
-          <a:stretch>
-            <a:fillRect/>
-          </a:stretch>
-        </p:blipFill>
-        <p:spPr>
-          <a:xfrm>
-            <a:off x="365760" y="1371600"/>
-            <a:ext cx="6766560" cy="4446597"/>
-          </a:xfrm>
-          <a:prstGeom prst="rect">
-            <a:avLst/>
-          </a:prstGeom>
-        </p:spPr>
-      </p:pic>
-      <p:sp>
-        <p:nvSpPr>
-          <p:cNvPr id="8" name="TextBox 7"/>
-          <p:cNvSpPr txBox="1"/>
-          <p:nvPr/>
-        </p:nvSpPr>
-        <p:spPr>
-          <a:xfrm>
-            <a:off x="7315200" y="1417320"/>
-            <a:ext cx="4389120" cy="4937760"/>
-          </a:xfrm>
-          <a:prstGeom prst="rect">
-            <a:avLst/>
-          </a:prstGeom>
-          <a:noFill/>
-        </p:spPr>
-        <p:txBody>
-          <a:bodyPr wrap="square" lIns="45720">
-            <a:spAutoFit/>
-          </a:bodyPr>
-          <a:lstStyle/>
-          <a:p>
-            <a:pPr>
-              <a:lnSpc>
-                <a:spcPct val="105000"/>
-              </a:lnSpc>
-              <a:spcAft>
-                <a:spcPts val="700"/>
-              </a:spcAft>
-            </a:pPr>
-            <a:r>
-              <a:rPr sz="1200">
-                <a:solidFill>
-                  <a:srgbClr val="FFC72C"/>
-                </a:solidFill>
-                <a:latin typeface="Calibri"/>
-              </a:rPr>
-              <a:t>▪  </a:t>
-            </a:r>
-            <a:r>
-              <a:rPr b="1" sz="1200">
-                <a:solidFill>
-                  <a:srgbClr val="1F2A44"/>
-                </a:solidFill>
-                <a:latin typeface="Calibri"/>
-              </a:rPr>
-              <a:t>Haugland reconciliation, +$4 to 8M direct, 58% of the variance. </a:t>
-            </a:r>
-            <a:r>
-              <a:rPr sz="1200">
-                <a:solidFill>
-                  <a:srgbClr val="1F2A44"/>
-                </a:solidFill>
-                <a:latin typeface="Calibri"/>
-              </a:rPr>
-              <a:t>Haugland's Class 3 base for overlapping scope is $19.2M; Rev 3 carries $8.3M. Until a signed scope map says which is right, every saving on slides 4 and 5 is provisional. Owner: PM + Cost Estimating + HEG. By: before the November PAF.</a:t>
-            </a:r>
-          </a:p>
-          <a:p>
-            <a:pPr>
-              <a:lnSpc>
-                <a:spcPct val="105000"/>
-              </a:lnSpc>
-              <a:spcAft>
-                <a:spcPts val="700"/>
-              </a:spcAft>
-            </a:pPr>
-            <a:r>
-              <a:rPr sz="1200">
-                <a:solidFill>
-                  <a:srgbClr val="FFC72C"/>
-                </a:solidFill>
-                <a:latin typeface="Calibri"/>
-              </a:rPr>
-              <a:t>▪  </a:t>
-            </a:r>
-            <a:r>
-              <a:rPr b="1" sz="1200">
-                <a:solidFill>
-                  <a:srgbClr val="1F2A44"/>
-                </a:solidFill>
-                <a:latin typeface="Calibri"/>
-              </a:rPr>
-              <a:t>Siting schedule, +5 months at P50, +9 at P80, 14% of the variance. </a:t>
-            </a:r>
-            <a:r>
-              <a:rPr sz="1200">
-                <a:solidFill>
-                  <a:srgbClr val="1F2A44"/>
-                </a:solidFill>
-                <a:latin typeface="Calibri"/>
-              </a:rPr>
-              <a:t>Every month costs about $0.37M in AFUDC, escalation and PM. Action: file Article 80 early, pre-brief the abutters on screening and sound, set the ZBA date within 90 days of filing. Owner: Siting + PM. By: Q1 2027.</a:t>
-            </a:r>
-          </a:p>
-          <a:p>
-            <a:pPr>
-              <a:lnSpc>
-                <a:spcPct val="105000"/>
-              </a:lnSpc>
-              <a:spcAft>
-                <a:spcPts val="700"/>
-              </a:spcAft>
-            </a:pPr>
-            <a:r>
-              <a:rPr sz="1200">
-                <a:solidFill>
-                  <a:srgbClr val="FFC72C"/>
-                </a:solidFill>
-                <a:latin typeface="Calibri"/>
-              </a:rPr>
-              <a:t>▪  </a:t>
-            </a:r>
-            <a:r>
-              <a:rPr b="1" sz="1200">
-                <a:solidFill>
-                  <a:srgbClr val="1F2A44"/>
-                </a:solidFill>
-                <a:latin typeface="Calibri"/>
-              </a:rPr>
-              <a:t>Exposures to carry honestly, $1.7 to 3.2M. </a:t>
-            </a:r>
-            <a:r>
-              <a:rPr sz="1200">
-                <a:solidFill>
-                  <a:srgbClr val="1F2A44"/>
-                </a:solidFill>
-                <a:latin typeface="Calibri"/>
-              </a:rPr>
-              <a:t>Sound mitigation ($467K dropped from the 2023 estimate), visual screening, police details, NFPA 855 changes, the GSU count. Price them now; a surprise in 2028 costs more than a line today.</a:t>
-            </a:r>
-          </a:p>
-          <a:p>
-            <a:pPr>
-              <a:lnSpc>
-                <a:spcPct val="105000"/>
-              </a:lnSpc>
-              <a:spcAft>
-                <a:spcPts val="700"/>
-              </a:spcAft>
-            </a:pPr>
-            <a:r>
-              <a:rPr sz="1200">
-                <a:solidFill>
-                  <a:srgbClr val="FFC72C"/>
-                </a:solidFill>
-                <a:latin typeface="Calibri"/>
-              </a:rPr>
-              <a:t>▪  </a:t>
-            </a:r>
-            <a:r>
-              <a:rPr b="1" sz="1200">
-                <a:solidFill>
-                  <a:srgbClr val="1F2A44"/>
-                </a:solidFill>
-                <a:latin typeface="Calibri"/>
-              </a:rPr>
-              <a:t>Everything on the left is ours to take. </a:t>
-            </a:r>
-            <a:r>
-              <a:rPr sz="1200">
-                <a:solidFill>
-                  <a:srgbClr val="1F2A44"/>
-                </a:solidFill>
-                <a:latin typeface="Calibri"/>
-              </a:rPr>
-              <a:t>No single lever exceeds $2M; together they are worth about $6.3M at the assessed odds and $11.8M if every one lands.</a:t>
             </a:r>
           </a:p>
         </p:txBody>
